--- a/邱冠文_關網AI應用工程師_面試簡報.pptx
+++ b/邱冠文_關網AI應用工程師_面試簡報.pptx
@@ -17,9 +17,10 @@
     <p:sldId id="265" r:id="rId11"/>
     <p:sldId id="266" r:id="rId12"/>
     <p:sldId id="267" r:id="rId13"/>
+    <p:sldId id="268" r:id="rId14"/>
   </p:sldIdLst>
   <p:notesMasterIdLst>
-    <p:notesMasterId r:id="rId14"/>
+    <p:notesMasterId r:id="rId15"/>
   </p:notesMasterIdLst>
   <p:sldSz cx="9144000" cy="5143500"/>
   <p:notesSz cx="5143500" cy="9144000"/>
@@ -601,7 +602,7 @@
           <a:p>
             <a:r>
               <a:rPr lang="en-US" dirty="0"/>
-              <a:t>這頁是我做功課後的一些想法，先說明這只是根據公開資訊的推想。第一條是 2023 年推出的 VAT 雲端會計憑證辨識系統，可以用多模態模型依 JSON Schema 抽欄位，再用規則檢核稅額與統編，信心不足的交給人工。第二條是法規與操作問題的 RAG 客服，官網最近很多公告都是客戶容易犯錯的規定，適合做成有來源的問答。第三條是把內部系統包成 MCP 工具，寫入類動作一定要人工確認。很想聽聽團隊實際的做法。</a:t>
+              <a:t>面試趣同職缺的心得寫到，HR 會請你把他當成完全不懂的客戶解釋 AI。原則是：不用專有名詞、用對方熟悉的發票情境、講能做什麼也講不能做什麼、最後回到對客戶的好處。這段請用你自己的話練到 60 秒內講完。</a:t>
             </a:r>
             <a:endParaRPr lang="en-US" dirty="0"/>
           </a:p>
@@ -689,7 +690,7 @@
           <a:p>
             <a:r>
               <a:rPr lang="en-US" dirty="0"/>
-              <a:t>我很清楚自己的缺口：沒有 RAG 上線經驗、MCP 和 LangGraph 還沒實作、PostgreSQL 與 Java 比較淺。這幾週我已經把 RAG、Agent、MCP 的原理和調校方法系統整理過。如果有機會加入，第一個月我會先熟悉系統與既有 RAG 流程並建立測試資料；第二個月接手 Tool Calling 與 MCP 元件；第三個月用檢索指標把品質量化，提出優化。</a:t>
+              <a:t>這頁是我做功課後的一些想法，先說明這只是根據公開資訊的推想。第一條是 2023 年推出的 VAT 雲端會計憑證辨識系統，可以用多模態模型依 JSON Schema 抽欄位，再用規則檢核稅額與統編，信心不足的交給人工。第二條是法規與操作問題的 RAG 客服，官網最近很多公告都是客戶容易犯錯的規定，適合做成有來源的問答。第三條是把內部系統包成 MCP 工具，寫入類動作一定要人工確認。很想聽聽團隊實際的做法。</a:t>
             </a:r>
             <a:endParaRPr lang="en-US" dirty="0"/>
           </a:p>
@@ -777,7 +778,7 @@
           <a:p>
             <a:r>
               <a:rPr lang="en-US" dirty="0"/>
-              <a:t>最後想請教幾個問題，也幫助我了解進來後的工作重點。（挑 2 個問，視時間而定。）謝謝各位花時間聽我的介紹。</a:t>
+              <a:t>我很清楚自己的缺口：沒有 RAG 上線經驗、MCP 和 LangGraph 還沒實作、PostgreSQL 與 Java 比較淺。這幾週我已經把 RAG、Agent、MCP 的原理和調校方法系統整理過。如果有機會加入，第一個月我會先熟悉系統與既有 RAG 流程並建立測試資料；第二個月接手 Tool Calling 與 MCP 元件；第三個月用檢索指標把品質量化，提出優化。</a:t>
             </a:r>
             <a:endParaRPr lang="en-US" dirty="0"/>
           </a:p>
@@ -801,6 +802,94 @@
             <a:fld id="{F7021451-1387-4CA6-816F-3879F97B5CBC}" type="slidenum">
               <a:rPr lang="en-US"/>
               <a:t>12</a:t>
+            </a:fld>
+            <a:endParaRPr lang="en-US"/>
+          </a:p>
+        </p:txBody>
+      </p:sp>
+    </p:spTree>
+    <p:extLst>
+      <p:ext uri="{BB962C8B-B14F-4D97-AF65-F5344CB8AC3E}">
+        <p14:creationId xmlns:p14="http://schemas.microsoft.com/office/powerpoint/2010/main" val="1024086991"/>
+      </p:ext>
+    </p:extLst>
+  </p:cSld>
+  <p:clrMapOvr>
+    <a:masterClrMapping/>
+  </p:clrMapOvr>
+</p:notes>
+</file>
+
+<file path=ppt/notesSlides/notesSlide13.xml><?xml version="1.0" encoding="utf-8"?>
+<p:notes xmlns:a="http://schemas.openxmlformats.org/drawingml/2006/main" xmlns:r="http://schemas.openxmlformats.org/officeDocument/2006/relationships" xmlns:p="http://schemas.openxmlformats.org/presentationml/2006/main">
+  <p:cSld>
+    <p:spTree>
+      <p:nvGrpSpPr>
+        <p:cNvPr id="1" name=""/>
+        <p:cNvGrpSpPr/>
+        <p:nvPr/>
+      </p:nvGrpSpPr>
+      <p:grpSpPr>
+        <a:xfrm>
+          <a:off x="0" y="0"/>
+          <a:ext cx="0" cy="0"/>
+          <a:chOff x="0" y="0"/>
+          <a:chExt cx="0" cy="0"/>
+        </a:xfrm>
+      </p:grpSpPr>
+      <p:sp>
+        <p:nvSpPr>
+          <p:cNvPr id="2" name="Slide Image Placeholder 1"/>
+          <p:cNvSpPr>
+            <a:spLocks noGrp="1" noRot="1" noChangeAspect="1"/>
+          </p:cNvSpPr>
+          <p:nvPr>
+            <p:ph type="sldImg"/>
+          </p:nvPr>
+        </p:nvSpPr>
+        <p:spPr/>
+      </p:sp>
+      <p:sp>
+        <p:nvSpPr>
+          <p:cNvPr id="3" name="Notes Placeholder 2"/>
+          <p:cNvSpPr>
+            <a:spLocks noGrp="1"/>
+          </p:cNvSpPr>
+          <p:nvPr>
+            <p:ph type="body" idx="1"/>
+          </p:nvPr>
+        </p:nvSpPr>
+        <p:spPr/>
+        <p:txBody>
+          <a:bodyPr/>
+          <a:lstStyle/>
+          <a:p>
+            <a:r>
+              <a:rPr lang="en-US" dirty="0"/>
+              <a:t>最後想請教幾個問題，也幫助我了解進來後的工作重點。（挑 2 個問，視時間而定。）謝謝各位花時間聽我的介紹。</a:t>
+            </a:r>
+            <a:endParaRPr lang="en-US" dirty="0"/>
+          </a:p>
+        </p:txBody>
+      </p:sp>
+      <p:sp>
+        <p:nvSpPr>
+          <p:cNvPr id="4" name="Slide Number Placeholder 3"/>
+          <p:cNvSpPr>
+            <a:spLocks noGrp="1"/>
+          </p:cNvSpPr>
+          <p:nvPr>
+            <p:ph type="sldNum" sz="quarter" idx="10"/>
+          </p:nvPr>
+        </p:nvSpPr>
+        <p:spPr/>
+        <p:txBody>
+          <a:bodyPr/>
+          <a:lstStyle/>
+          <a:p>
+            <a:fld id="{F7021451-1387-4CA6-816F-3879F97B5CBC}" type="slidenum">
+              <a:rPr lang="en-US"/>
+              <a:t>13</a:t>
             </a:fld>
             <a:endParaRPr lang="en-US"/>
           </a:p>
@@ -2998,7 +3087,7 @@
                 <a:ea typeface="Consolas" pitchFamily="34" charset="-122"/>
                 <a:cs typeface="Consolas" pitchFamily="34" charset="-120"/>
               </a:rPr>
-              <a:t>IDEAS · 依公開資訊推想</a:t>
+              <a:t>EXPLAIN AI TO A CUSTOMER</a:t>
             </a:r>
             <a:endParaRPr lang="en-US" sz="900" dirty="0"/>
           </a:p>
@@ -3037,7 +3126,7 @@
                 <a:ea typeface="Consolas" pitchFamily="34" charset="-122"/>
                 <a:cs typeface="Consolas" pitchFamily="34" charset="-120"/>
               </a:rPr>
-              <a:t>10 / 12</a:t>
+              <a:t>10 / 13</a:t>
             </a:r>
             <a:endParaRPr lang="en-US" sz="900" dirty="0"/>
           </a:p>
@@ -3076,7 +3165,7 @@
                 <a:ea typeface="Microsoft JhengHei" pitchFamily="34" charset="-122"/>
                 <a:cs typeface="Microsoft JhengHei" pitchFamily="34" charset="-120"/>
               </a:rPr>
-              <a:t>我對 AI 落地的初步想法</a:t>
+              <a:t>如果客戶問我：AI 到底是什麼？</a:t>
             </a:r>
             <a:endParaRPr lang="en-US" sz="2600" dirty="0"/>
           </a:p>
@@ -3084,30 +3173,55 @@
       </p:sp>
       <p:sp>
         <p:nvSpPr>
-          <p:cNvPr id="5" name="Text 3"/>
-          <p:cNvSpPr txBox="1"/>
-          <p:nvPr/>
-        </p:nvSpPr>
-        <p:spPr>
-          <a:xfrm>
-            <a:off x="457200" y="1234440"/>
-            <a:ext cx="1645920" cy="822960"/>
-          </a:xfrm>
-          <a:prstGeom prst="rect">
-            <a:avLst/>
-          </a:prstGeom>
-          <a:noFill/>
-          <a:ln/>
-        </p:spPr>
-        <p:txBody>
-          <a:bodyPr wrap="square" lIns="0" tIns="0" rIns="0" bIns="0" rtlCol="0" anchor="ctr"/>
+          <p:cNvPr id="5" name="Shape 3"/>
+          <p:cNvSpPr/>
+          <p:nvPr/>
+        </p:nvSpPr>
+        <p:spPr>
+          <a:xfrm>
+            <a:off x="457200" y="1188720"/>
+            <a:ext cx="4846320" cy="3337560"/>
+          </a:xfrm>
+          <a:prstGeom prst="rect">
+            <a:avLst/>
+          </a:prstGeom>
+          <a:solidFill>
+            <a:srgbClr val="16232A"/>
+          </a:solidFill>
+          <a:ln w="15875">
+            <a:solidFill>
+              <a:srgbClr val="0ABAB5"/>
+            </a:solidFill>
+            <a:prstDash val="solid"/>
+          </a:ln>
+        </p:spPr>
+      </p:sp>
+      <p:sp>
+        <p:nvSpPr>
+          <p:cNvPr id="6" name="Text 4"/>
+          <p:cNvSpPr txBox="1"/>
+          <p:nvPr/>
+        </p:nvSpPr>
+        <p:spPr>
+          <a:xfrm>
+            <a:off x="685800" y="1325880"/>
+            <a:ext cx="2743200" cy="320040"/>
+          </a:xfrm>
+          <a:prstGeom prst="rect">
+            <a:avLst/>
+          </a:prstGeom>
+          <a:noFill/>
+          <a:ln/>
+        </p:spPr>
+        <p:txBody>
+          <a:bodyPr wrap="square" lIns="0" tIns="0" rIns="0" bIns="0" rtlCol="0" anchor="t"/>
           <a:lstStyle/>
           <a:p>
             <a:pPr indent="0" marL="0">
               <a:buNone/>
             </a:pPr>
             <a:r>
-              <a:rPr lang="en-US" sz="1250" b="1" dirty="0">
+              <a:rPr lang="en-US" sz="1300" b="1" dirty="0">
                 <a:solidFill>
                   <a:srgbClr val="0ABAB5"/>
                 </a:solidFill>
@@ -3115,7 +3229,46 @@
                 <a:ea typeface="Microsoft JhengHei" pitchFamily="34" charset="-122"/>
                 <a:cs typeface="Microsoft JhengHei" pitchFamily="34" charset="-120"/>
               </a:rPr>
-              <a:t>VAT 憑證辨識升級</a:t>
+              <a:t>60 秒說法</a:t>
+            </a:r>
+            <a:endParaRPr lang="en-US" sz="1300" dirty="0"/>
+          </a:p>
+        </p:txBody>
+      </p:sp>
+      <p:sp>
+        <p:nvSpPr>
+          <p:cNvPr id="7" name="Text 5"/>
+          <p:cNvSpPr txBox="1"/>
+          <p:nvPr/>
+        </p:nvSpPr>
+        <p:spPr>
+          <a:xfrm>
+            <a:off x="685800" y="1737360"/>
+            <a:ext cx="4434840" cy="640080"/>
+          </a:xfrm>
+          <a:prstGeom prst="rect">
+            <a:avLst/>
+          </a:prstGeom>
+          <a:noFill/>
+          <a:ln/>
+        </p:spPr>
+        <p:txBody>
+          <a:bodyPr wrap="square" lIns="0" tIns="0" rIns="0" bIns="0" rtlCol="0" anchor="t"/>
+          <a:lstStyle/>
+          <a:p>
+            <a:pPr indent="0" marL="0">
+              <a:buNone/>
+            </a:pPr>
+            <a:r>
+              <a:rPr lang="en-US" sz="1250" dirty="0">
+                <a:solidFill>
+                  <a:srgbClr val="F1F6F6"/>
+                </a:solidFill>
+                <a:latin typeface="Microsoft JhengHei" pitchFamily="34" charset="0"/>
+                <a:ea typeface="Microsoft JhengHei" pitchFamily="34" charset="-122"/>
+                <a:cs typeface="Microsoft JhengHei" pitchFamily="34" charset="-120"/>
+              </a:rPr>
+              <a:t>AI 可以想成一位讀過非常大量文件的新同事，很會看懂文字、整理重點、回答問題。</a:t>
             </a:r>
             <a:endParaRPr lang="en-US" sz="1250" dirty="0"/>
           </a:p>
@@ -3123,14 +3276,170 @@
       </p:sp>
       <p:sp>
         <p:nvSpPr>
-          <p:cNvPr id="6" name="Shape 4"/>
+          <p:cNvPr id="8" name="Text 6"/>
+          <p:cNvSpPr txBox="1"/>
+          <p:nvPr/>
+        </p:nvSpPr>
+        <p:spPr>
+          <a:xfrm>
+            <a:off x="685800" y="2377440"/>
+            <a:ext cx="4434840" cy="868680"/>
+          </a:xfrm>
+          <a:prstGeom prst="rect">
+            <a:avLst/>
+          </a:prstGeom>
+          <a:noFill/>
+          <a:ln/>
+        </p:spPr>
+        <p:txBody>
+          <a:bodyPr wrap="square" lIns="0" tIns="0" rIns="0" bIns="0" rtlCol="0" anchor="t"/>
+          <a:lstStyle/>
+          <a:p>
+            <a:pPr indent="0" marL="0">
+              <a:buNone/>
+            </a:pPr>
+            <a:r>
+              <a:rPr lang="en-US" sz="1200" dirty="0">
+                <a:solidFill>
+                  <a:srgbClr val="F1F6F6"/>
+                </a:solidFill>
+                <a:latin typeface="Microsoft JhengHei" pitchFamily="34" charset="0"/>
+                <a:ea typeface="Microsoft JhengHei" pitchFamily="34" charset="-122"/>
+                <a:cs typeface="Microsoft JhengHei" pitchFamily="34" charset="-120"/>
+              </a:rPr>
+              <a:t>例如每個月的發票與憑證，AI 可以幫忙讀出統編、金額，或回答「折讓單要誰開」這類常見問題，省下查資料和打字的時間。</a:t>
+            </a:r>
+            <a:endParaRPr lang="en-US" sz="1200" dirty="0"/>
+          </a:p>
+        </p:txBody>
+      </p:sp>
+      <p:sp>
+        <p:nvSpPr>
+          <p:cNvPr id="9" name="Text 7"/>
+          <p:cNvSpPr txBox="1"/>
+          <p:nvPr/>
+        </p:nvSpPr>
+        <p:spPr>
+          <a:xfrm>
+            <a:off x="685800" y="3246120"/>
+            <a:ext cx="4434840" cy="685800"/>
+          </a:xfrm>
+          <a:prstGeom prst="rect">
+            <a:avLst/>
+          </a:prstGeom>
+          <a:noFill/>
+          <a:ln/>
+        </p:spPr>
+        <p:txBody>
+          <a:bodyPr wrap="square" lIns="0" tIns="0" rIns="0" bIns="0" rtlCol="0" anchor="t"/>
+          <a:lstStyle/>
+          <a:p>
+            <a:pPr indent="0" marL="0">
+              <a:buNone/>
+            </a:pPr>
+            <a:r>
+              <a:rPr lang="en-US" sz="1250" dirty="0">
+                <a:solidFill>
+                  <a:srgbClr val="F1F6F6"/>
+                </a:solidFill>
+                <a:latin typeface="Microsoft JhengHei" pitchFamily="34" charset="0"/>
+                <a:ea typeface="Microsoft JhengHei" pitchFamily="34" charset="-122"/>
+                <a:cs typeface="Microsoft JhengHei" pitchFamily="34" charset="-120"/>
+              </a:rPr>
+              <a:t>但它也會犯錯，所以我們讓它只根據公司確認過的資料回答，重要的金額與送出動作由人再確認。</a:t>
+            </a:r>
+            <a:endParaRPr lang="en-US" sz="1250" dirty="0"/>
+          </a:p>
+        </p:txBody>
+      </p:sp>
+      <p:sp>
+        <p:nvSpPr>
+          <p:cNvPr id="10" name="Text 8"/>
+          <p:cNvSpPr txBox="1"/>
+          <p:nvPr/>
+        </p:nvSpPr>
+        <p:spPr>
+          <a:xfrm>
+            <a:off x="685800" y="3977640"/>
+            <a:ext cx="4434840" cy="365760"/>
+          </a:xfrm>
+          <a:prstGeom prst="rect">
+            <a:avLst/>
+          </a:prstGeom>
+          <a:noFill/>
+          <a:ln/>
+        </p:spPr>
+        <p:txBody>
+          <a:bodyPr wrap="square" lIns="0" tIns="0" rIns="0" bIns="0" rtlCol="0" anchor="t"/>
+          <a:lstStyle/>
+          <a:p>
+            <a:pPr indent="0" marL="0">
+              <a:buNone/>
+            </a:pPr>
+            <a:r>
+              <a:rPr lang="en-US" sz="1250" b="1" dirty="0">
+                <a:solidFill>
+                  <a:srgbClr val="0ABAB5"/>
+                </a:solidFill>
+                <a:latin typeface="Microsoft JhengHei" pitchFamily="34" charset="0"/>
+                <a:ea typeface="Microsoft JhengHei" pitchFamily="34" charset="-122"/>
+                <a:cs typeface="Microsoft JhengHei" pitchFamily="34" charset="-120"/>
+              </a:rPr>
+              <a:t>AI 把重複耗時的工作做快，人負責最後把關。</a:t>
+            </a:r>
+            <a:endParaRPr lang="en-US" sz="1250" dirty="0"/>
+          </a:p>
+        </p:txBody>
+      </p:sp>
+      <p:sp>
+        <p:nvSpPr>
+          <p:cNvPr id="11" name="Text 9"/>
+          <p:cNvSpPr txBox="1"/>
+          <p:nvPr/>
+        </p:nvSpPr>
+        <p:spPr>
+          <a:xfrm>
+            <a:off x="5669280" y="1188720"/>
+            <a:ext cx="3017520" cy="320040"/>
+          </a:xfrm>
+          <a:prstGeom prst="rect">
+            <a:avLst/>
+          </a:prstGeom>
+          <a:noFill/>
+          <a:ln/>
+        </p:spPr>
+        <p:txBody>
+          <a:bodyPr wrap="square" lIns="0" tIns="0" rIns="0" bIns="0" rtlCol="0" anchor="t"/>
+          <a:lstStyle/>
+          <a:p>
+            <a:pPr indent="0" marL="0">
+              <a:buNone/>
+            </a:pPr>
+            <a:r>
+              <a:rPr lang="en-US" sz="1200" b="1" dirty="0">
+                <a:solidFill>
+                  <a:srgbClr val="9FB0B2"/>
+                </a:solidFill>
+                <a:latin typeface="Microsoft JhengHei" pitchFamily="34" charset="0"/>
+                <a:ea typeface="Microsoft JhengHei" pitchFamily="34" charset="-122"/>
+                <a:cs typeface="Microsoft JhengHei" pitchFamily="34" charset="-120"/>
+              </a:rPr>
+              <a:t>被追問時可以接的技術</a:t>
+            </a:r>
+            <a:endParaRPr lang="en-US" sz="1200" dirty="0"/>
+          </a:p>
+        </p:txBody>
+      </p:sp>
+      <p:sp>
+        <p:nvSpPr>
+          <p:cNvPr id="12" name="Shape 10"/>
           <p:cNvSpPr/>
           <p:nvPr/>
         </p:nvSpPr>
         <p:spPr>
           <a:xfrm>
-            <a:off x="2148840" y="1280160"/>
-            <a:ext cx="1417320" cy="731520"/>
+            <a:off x="5669280" y="1645920"/>
+            <a:ext cx="1417320" cy="502920"/>
           </a:xfrm>
           <a:prstGeom prst="rect">
             <a:avLst/>
@@ -3148,14 +3457,14 @@
       </p:sp>
       <p:sp>
         <p:nvSpPr>
-          <p:cNvPr id="7" name="Text 5"/>
-          <p:cNvSpPr txBox="1"/>
-          <p:nvPr/>
-        </p:nvSpPr>
-        <p:spPr>
-          <a:xfrm>
-            <a:off x="2148840" y="1280160"/>
-            <a:ext cx="1417320" cy="731520"/>
+          <p:cNvPr id="13" name="Text 11"/>
+          <p:cNvSpPr txBox="1"/>
+          <p:nvPr/>
+        </p:nvSpPr>
+        <p:spPr>
+          <a:xfrm>
+            <a:off x="5669280" y="1645920"/>
+            <a:ext cx="1417320" cy="502920"/>
           </a:xfrm>
           <a:prstGeom prst="rect">
             <a:avLst/>
@@ -3171,7 +3480,7 @@
               <a:buNone/>
             </a:pPr>
             <a:r>
-              <a:rPr lang="en-US" sz="1000" dirty="0">
+              <a:rPr lang="en-US" sz="1050" dirty="0">
                 <a:solidFill>
                   <a:srgbClr val="F1F6F6"/>
                 </a:solidFill>
@@ -3179,22 +3488,22 @@
                 <a:ea typeface="Microsoft JhengHei" pitchFamily="34" charset="-122"/>
                 <a:cs typeface="Microsoft JhengHei" pitchFamily="34" charset="-120"/>
               </a:rPr>
-              <a:t>憑證影像</a:t>
-            </a:r>
-            <a:endParaRPr lang="en-US" sz="1000" dirty="0"/>
-          </a:p>
-        </p:txBody>
-      </p:sp>
-      <p:sp>
-        <p:nvSpPr>
-          <p:cNvPr id="8" name="Shape 6"/>
+              <a:t>讀過大量文件</a:t>
+            </a:r>
+            <a:endParaRPr lang="en-US" sz="1050" dirty="0"/>
+          </a:p>
+        </p:txBody>
+      </p:sp>
+      <p:sp>
+        <p:nvSpPr>
+          <p:cNvPr id="14" name="Shape 12"/>
           <p:cNvSpPr/>
           <p:nvPr/>
         </p:nvSpPr>
         <p:spPr>
           <a:xfrm>
-            <a:off x="3566160" y="1645920"/>
-            <a:ext cx="256032" cy="0"/>
+            <a:off x="7086600" y="1897380"/>
+            <a:ext cx="320040" cy="0"/>
           </a:xfrm>
           <a:prstGeom prst="line">
             <a:avLst/>
@@ -3211,14 +3520,78 @@
       </p:sp>
       <p:sp>
         <p:nvSpPr>
-          <p:cNvPr id="9" name="Shape 7"/>
+          <p:cNvPr id="15" name="Shape 13"/>
           <p:cNvSpPr/>
           <p:nvPr/>
         </p:nvSpPr>
         <p:spPr>
           <a:xfrm>
-            <a:off x="3822192" y="1280160"/>
-            <a:ext cx="1417320" cy="731520"/>
+            <a:off x="7406640" y="1645920"/>
+            <a:ext cx="1280160" cy="502920"/>
+          </a:xfrm>
+          <a:prstGeom prst="rect">
+            <a:avLst/>
+          </a:prstGeom>
+          <a:solidFill>
+            <a:srgbClr val="16232A"/>
+          </a:solidFill>
+          <a:ln w="12700">
+            <a:solidFill>
+              <a:srgbClr val="0ABAB5"/>
+            </a:solidFill>
+            <a:prstDash val="solid"/>
+          </a:ln>
+        </p:spPr>
+      </p:sp>
+      <p:sp>
+        <p:nvSpPr>
+          <p:cNvPr id="16" name="Text 14"/>
+          <p:cNvSpPr txBox="1"/>
+          <p:nvPr/>
+        </p:nvSpPr>
+        <p:spPr>
+          <a:xfrm>
+            <a:off x="7406640" y="1645920"/>
+            <a:ext cx="1280160" cy="502920"/>
+          </a:xfrm>
+          <a:prstGeom prst="rect">
+            <a:avLst/>
+          </a:prstGeom>
+          <a:noFill/>
+          <a:ln/>
+        </p:spPr>
+        <p:txBody>
+          <a:bodyPr wrap="square" lIns="0" tIns="0" rIns="0" bIns="0" rtlCol="0" anchor="ctr"/>
+          <a:lstStyle/>
+          <a:p>
+            <a:pPr algn="ctr" indent="0" marL="0">
+              <a:buNone/>
+            </a:pPr>
+            <a:r>
+              <a:rPr lang="en-US" sz="1000" b="1" dirty="0">
+                <a:solidFill>
+                  <a:srgbClr val="F1F6F6"/>
+                </a:solidFill>
+                <a:latin typeface="Consolas" pitchFamily="34" charset="0"/>
+                <a:ea typeface="Consolas" pitchFamily="34" charset="-122"/>
+                <a:cs typeface="Consolas" pitchFamily="34" charset="-120"/>
+              </a:rPr>
+              <a:t>預訓練</a:t>
+            </a:r>
+            <a:endParaRPr lang="en-US" sz="1000" dirty="0"/>
+          </a:p>
+        </p:txBody>
+      </p:sp>
+      <p:sp>
+        <p:nvSpPr>
+          <p:cNvPr id="17" name="Shape 15"/>
+          <p:cNvSpPr/>
+          <p:nvPr/>
+        </p:nvSpPr>
+        <p:spPr>
+          <a:xfrm>
+            <a:off x="5669280" y="2377440"/>
+            <a:ext cx="1417320" cy="502920"/>
           </a:xfrm>
           <a:prstGeom prst="rect">
             <a:avLst/>
@@ -3236,14 +3609,14 @@
       </p:sp>
       <p:sp>
         <p:nvSpPr>
-          <p:cNvPr id="10" name="Text 8"/>
-          <p:cNvSpPr txBox="1"/>
-          <p:nvPr/>
-        </p:nvSpPr>
-        <p:spPr>
-          <a:xfrm>
-            <a:off x="3822192" y="1280160"/>
-            <a:ext cx="1417320" cy="731520"/>
+          <p:cNvPr id="18" name="Text 16"/>
+          <p:cNvSpPr txBox="1"/>
+          <p:nvPr/>
+        </p:nvSpPr>
+        <p:spPr>
+          <a:xfrm>
+            <a:off x="5669280" y="2377440"/>
+            <a:ext cx="1417320" cy="502920"/>
           </a:xfrm>
           <a:prstGeom prst="rect">
             <a:avLst/>
@@ -3259,7 +3632,7 @@
               <a:buNone/>
             </a:pPr>
             <a:r>
-              <a:rPr lang="en-US" sz="1000" dirty="0">
+              <a:rPr lang="en-US" sz="1050" dirty="0">
                 <a:solidFill>
                   <a:srgbClr val="F1F6F6"/>
                 </a:solidFill>
@@ -3267,39 +3640,22 @@
                 <a:ea typeface="Microsoft JhengHei" pitchFamily="34" charset="-122"/>
                 <a:cs typeface="Microsoft JhengHei" pitchFamily="34" charset="-120"/>
               </a:rPr>
-              <a:t>多模態抽欄位</a:t>
-            </a:r>
-            <a:endParaRPr lang="en-US" sz="1000" dirty="0"/>
-          </a:p>
-          <a:p>
-            <a:pPr algn="ctr" indent="0" marL="0">
-              <a:buNone/>
-            </a:pPr>
-            <a:r>
-              <a:rPr lang="en-US" sz="1000" dirty="0">
-                <a:solidFill>
-                  <a:srgbClr val="F1F6F6"/>
-                </a:solidFill>
-                <a:latin typeface="Microsoft JhengHei" pitchFamily="34" charset="0"/>
-                <a:ea typeface="Microsoft JhengHei" pitchFamily="34" charset="-122"/>
-                <a:cs typeface="Microsoft JhengHei" pitchFamily="34" charset="-120"/>
-              </a:rPr>
-              <a:t>JSON Schema</a:t>
-            </a:r>
-            <a:endParaRPr lang="en-US" sz="1000" dirty="0"/>
-          </a:p>
-        </p:txBody>
-      </p:sp>
-      <p:sp>
-        <p:nvSpPr>
-          <p:cNvPr id="11" name="Shape 9"/>
+              <a:t>只根據確認過的資料</a:t>
+            </a:r>
+            <a:endParaRPr lang="en-US" sz="1050" dirty="0"/>
+          </a:p>
+        </p:txBody>
+      </p:sp>
+      <p:sp>
+        <p:nvSpPr>
+          <p:cNvPr id="19" name="Shape 17"/>
           <p:cNvSpPr/>
           <p:nvPr/>
         </p:nvSpPr>
         <p:spPr>
           <a:xfrm>
-            <a:off x="5239512" y="1645920"/>
-            <a:ext cx="256032" cy="0"/>
+            <a:off x="7086600" y="2628900"/>
+            <a:ext cx="320040" cy="0"/>
           </a:xfrm>
           <a:prstGeom prst="line">
             <a:avLst/>
@@ -3316,14 +3672,78 @@
       </p:sp>
       <p:sp>
         <p:nvSpPr>
-          <p:cNvPr id="12" name="Shape 10"/>
+          <p:cNvPr id="20" name="Shape 18"/>
           <p:cNvSpPr/>
           <p:nvPr/>
         </p:nvSpPr>
         <p:spPr>
           <a:xfrm>
-            <a:off x="5495544" y="1280160"/>
-            <a:ext cx="1417320" cy="731520"/>
+            <a:off x="7406640" y="2377440"/>
+            <a:ext cx="1280160" cy="502920"/>
+          </a:xfrm>
+          <a:prstGeom prst="rect">
+            <a:avLst/>
+          </a:prstGeom>
+          <a:solidFill>
+            <a:srgbClr val="16232A"/>
+          </a:solidFill>
+          <a:ln w="12700">
+            <a:solidFill>
+              <a:srgbClr val="0ABAB5"/>
+            </a:solidFill>
+            <a:prstDash val="solid"/>
+          </a:ln>
+        </p:spPr>
+      </p:sp>
+      <p:sp>
+        <p:nvSpPr>
+          <p:cNvPr id="21" name="Text 19"/>
+          <p:cNvSpPr txBox="1"/>
+          <p:nvPr/>
+        </p:nvSpPr>
+        <p:spPr>
+          <a:xfrm>
+            <a:off x="7406640" y="2377440"/>
+            <a:ext cx="1280160" cy="502920"/>
+          </a:xfrm>
+          <a:prstGeom prst="rect">
+            <a:avLst/>
+          </a:prstGeom>
+          <a:noFill/>
+          <a:ln/>
+        </p:spPr>
+        <p:txBody>
+          <a:bodyPr wrap="square" lIns="0" tIns="0" rIns="0" bIns="0" rtlCol="0" anchor="ctr"/>
+          <a:lstStyle/>
+          <a:p>
+            <a:pPr algn="ctr" indent="0" marL="0">
+              <a:buNone/>
+            </a:pPr>
+            <a:r>
+              <a:rPr lang="en-US" sz="1000" b="1" dirty="0">
+                <a:solidFill>
+                  <a:srgbClr val="F1F6F6"/>
+                </a:solidFill>
+                <a:latin typeface="Consolas" pitchFamily="34" charset="0"/>
+                <a:ea typeface="Consolas" pitchFamily="34" charset="-122"/>
+                <a:cs typeface="Consolas" pitchFamily="34" charset="-120"/>
+              </a:rPr>
+              <a:t>RAG</a:t>
+            </a:r>
+            <a:endParaRPr lang="en-US" sz="1000" dirty="0"/>
+          </a:p>
+        </p:txBody>
+      </p:sp>
+      <p:sp>
+        <p:nvSpPr>
+          <p:cNvPr id="22" name="Shape 20"/>
+          <p:cNvSpPr/>
+          <p:nvPr/>
+        </p:nvSpPr>
+        <p:spPr>
+          <a:xfrm>
+            <a:off x="5669280" y="3108960"/>
+            <a:ext cx="1417320" cy="502920"/>
           </a:xfrm>
           <a:prstGeom prst="rect">
             <a:avLst/>
@@ -3341,14 +3761,14 @@
       </p:sp>
       <p:sp>
         <p:nvSpPr>
-          <p:cNvPr id="13" name="Text 11"/>
-          <p:cNvSpPr txBox="1"/>
-          <p:nvPr/>
-        </p:nvSpPr>
-        <p:spPr>
-          <a:xfrm>
-            <a:off x="5495544" y="1280160"/>
-            <a:ext cx="1417320" cy="731520"/>
+          <p:cNvPr id="23" name="Text 21"/>
+          <p:cNvSpPr txBox="1"/>
+          <p:nvPr/>
+        </p:nvSpPr>
+        <p:spPr>
+          <a:xfrm>
+            <a:off x="5669280" y="3108960"/>
+            <a:ext cx="1417320" cy="502920"/>
           </a:xfrm>
           <a:prstGeom prst="rect">
             <a:avLst/>
@@ -3364,7 +3784,7 @@
               <a:buNone/>
             </a:pPr>
             <a:r>
-              <a:rPr lang="en-US" sz="1000" dirty="0">
+              <a:rPr lang="en-US" sz="1050" dirty="0">
                 <a:solidFill>
                   <a:srgbClr val="F1F6F6"/>
                 </a:solidFill>
@@ -3372,39 +3792,22 @@
                 <a:ea typeface="Microsoft JhengHei" pitchFamily="34" charset="-122"/>
                 <a:cs typeface="Microsoft JhengHei" pitchFamily="34" charset="-120"/>
               </a:rPr>
-              <a:t>規則檢核</a:t>
-            </a:r>
-            <a:endParaRPr lang="en-US" sz="1000" dirty="0"/>
-          </a:p>
-          <a:p>
-            <a:pPr algn="ctr" indent="0" marL="0">
-              <a:buNone/>
-            </a:pPr>
-            <a:r>
-              <a:rPr lang="en-US" sz="1000" dirty="0">
-                <a:solidFill>
-                  <a:srgbClr val="F1F6F6"/>
-                </a:solidFill>
-                <a:latin typeface="Microsoft JhengHei" pitchFamily="34" charset="0"/>
-                <a:ea typeface="Microsoft JhengHei" pitchFamily="34" charset="-122"/>
-                <a:cs typeface="Microsoft JhengHei" pitchFamily="34" charset="-120"/>
-              </a:rPr>
-              <a:t>稅額、統編檢查碼</a:t>
-            </a:r>
-            <a:endParaRPr lang="en-US" sz="1000" dirty="0"/>
-          </a:p>
-        </p:txBody>
-      </p:sp>
-      <p:sp>
-        <p:nvSpPr>
-          <p:cNvPr id="14" name="Shape 12"/>
+              <a:t>也會犯錯</a:t>
+            </a:r>
+            <a:endParaRPr lang="en-US" sz="1050" dirty="0"/>
+          </a:p>
+        </p:txBody>
+      </p:sp>
+      <p:sp>
+        <p:nvSpPr>
+          <p:cNvPr id="24" name="Shape 22"/>
           <p:cNvSpPr/>
           <p:nvPr/>
         </p:nvSpPr>
         <p:spPr>
           <a:xfrm>
-            <a:off x="6912864" y="1645920"/>
-            <a:ext cx="256032" cy="0"/>
+            <a:off x="7086600" y="3360420"/>
+            <a:ext cx="320040" cy="0"/>
           </a:xfrm>
           <a:prstGeom prst="line">
             <a:avLst/>
@@ -3421,14 +3824,14 @@
       </p:sp>
       <p:sp>
         <p:nvSpPr>
-          <p:cNvPr id="15" name="Shape 13"/>
+          <p:cNvPr id="25" name="Shape 23"/>
           <p:cNvSpPr/>
           <p:nvPr/>
         </p:nvSpPr>
         <p:spPr>
           <a:xfrm>
-            <a:off x="7168896" y="1280160"/>
-            <a:ext cx="1417320" cy="731520"/>
+            <a:off x="7406640" y="3108960"/>
+            <a:ext cx="1280160" cy="502920"/>
           </a:xfrm>
           <a:prstGeom prst="rect">
             <a:avLst/>
@@ -3446,14 +3849,14 @@
       </p:sp>
       <p:sp>
         <p:nvSpPr>
-          <p:cNvPr id="16" name="Text 14"/>
-          <p:cNvSpPr txBox="1"/>
-          <p:nvPr/>
-        </p:nvSpPr>
-        <p:spPr>
-          <a:xfrm>
-            <a:off x="7168896" y="1280160"/>
-            <a:ext cx="1417320" cy="731520"/>
+          <p:cNvPr id="26" name="Text 24"/>
+          <p:cNvSpPr txBox="1"/>
+          <p:nvPr/>
+        </p:nvSpPr>
+        <p:spPr>
+          <a:xfrm>
+            <a:off x="7406640" y="3108960"/>
+            <a:ext cx="1280160" cy="502920"/>
           </a:xfrm>
           <a:prstGeom prst="rect">
             <a:avLst/>
@@ -3469,86 +3872,30 @@
               <a:buNone/>
             </a:pPr>
             <a:r>
-              <a:rPr lang="en-US" sz="1000" dirty="0">
+              <a:rPr lang="en-US" sz="1000" b="1" dirty="0">
                 <a:solidFill>
                   <a:srgbClr val="F1F6F6"/>
                 </a:solidFill>
-                <a:latin typeface="Microsoft JhengHei" pitchFamily="34" charset="0"/>
-                <a:ea typeface="Microsoft JhengHei" pitchFamily="34" charset="-122"/>
-                <a:cs typeface="Microsoft JhengHei" pitchFamily="34" charset="-120"/>
-              </a:rPr>
-              <a:t>低信心</a:t>
+                <a:latin typeface="Consolas" pitchFamily="34" charset="0"/>
+                <a:ea typeface="Consolas" pitchFamily="34" charset="-122"/>
+                <a:cs typeface="Consolas" pitchFamily="34" charset="-120"/>
+              </a:rPr>
+              <a:t>幻覺</a:t>
             </a:r>
             <a:endParaRPr lang="en-US" sz="1000" dirty="0"/>
           </a:p>
-          <a:p>
-            <a:pPr algn="ctr" indent="0" marL="0">
-              <a:buNone/>
-            </a:pPr>
-            <a:r>
-              <a:rPr lang="en-US" sz="1000" dirty="0">
-                <a:solidFill>
-                  <a:srgbClr val="F1F6F6"/>
-                </a:solidFill>
-                <a:latin typeface="Microsoft JhengHei" pitchFamily="34" charset="0"/>
-                <a:ea typeface="Microsoft JhengHei" pitchFamily="34" charset="-122"/>
-                <a:cs typeface="Microsoft JhengHei" pitchFamily="34" charset="-120"/>
-              </a:rPr>
-              <a:t>轉人工確認</a:t>
-            </a:r>
-            <a:endParaRPr lang="en-US" sz="1000" dirty="0"/>
-          </a:p>
-        </p:txBody>
-      </p:sp>
-      <p:sp>
-        <p:nvSpPr>
-          <p:cNvPr id="17" name="Text 15"/>
-          <p:cNvSpPr txBox="1"/>
-          <p:nvPr/>
-        </p:nvSpPr>
-        <p:spPr>
-          <a:xfrm>
-            <a:off x="457200" y="2313432"/>
-            <a:ext cx="1645920" cy="822960"/>
-          </a:xfrm>
-          <a:prstGeom prst="rect">
-            <a:avLst/>
-          </a:prstGeom>
-          <a:noFill/>
-          <a:ln/>
-        </p:spPr>
-        <p:txBody>
-          <a:bodyPr wrap="square" lIns="0" tIns="0" rIns="0" bIns="0" rtlCol="0" anchor="ctr"/>
-          <a:lstStyle/>
-          <a:p>
-            <a:pPr indent="0" marL="0">
-              <a:buNone/>
-            </a:pPr>
-            <a:r>
-              <a:rPr lang="en-US" sz="1250" b="1" dirty="0">
-                <a:solidFill>
-                  <a:srgbClr val="0ABAB5"/>
-                </a:solidFill>
-                <a:latin typeface="Microsoft JhengHei" pitchFamily="34" charset="0"/>
-                <a:ea typeface="Microsoft JhengHei" pitchFamily="34" charset="-122"/>
-                <a:cs typeface="Microsoft JhengHei" pitchFamily="34" charset="-120"/>
-              </a:rPr>
-              <a:t>法規與操作客服 RAG</a:t>
-            </a:r>
-            <a:endParaRPr lang="en-US" sz="1250" dirty="0"/>
-          </a:p>
-        </p:txBody>
-      </p:sp>
-      <p:sp>
-        <p:nvSpPr>
-          <p:cNvPr id="18" name="Shape 16"/>
+        </p:txBody>
+      </p:sp>
+      <p:sp>
+        <p:nvSpPr>
+          <p:cNvPr id="27" name="Shape 25"/>
           <p:cNvSpPr/>
           <p:nvPr/>
         </p:nvSpPr>
         <p:spPr>
           <a:xfrm>
-            <a:off x="2148840" y="2359152"/>
-            <a:ext cx="1417320" cy="731520"/>
+            <a:off x="5669280" y="3840480"/>
+            <a:ext cx="1417320" cy="502920"/>
           </a:xfrm>
           <a:prstGeom prst="rect">
             <a:avLst/>
@@ -3566,14 +3913,14 @@
       </p:sp>
       <p:sp>
         <p:nvSpPr>
-          <p:cNvPr id="19" name="Text 17"/>
-          <p:cNvSpPr txBox="1"/>
-          <p:nvPr/>
-        </p:nvSpPr>
-        <p:spPr>
-          <a:xfrm>
-            <a:off x="2148840" y="2359152"/>
-            <a:ext cx="1417320" cy="731520"/>
+          <p:cNvPr id="28" name="Text 26"/>
+          <p:cNvSpPr txBox="1"/>
+          <p:nvPr/>
+        </p:nvSpPr>
+        <p:spPr>
+          <a:xfrm>
+            <a:off x="5669280" y="3840480"/>
+            <a:ext cx="1417320" cy="502920"/>
           </a:xfrm>
           <a:prstGeom prst="rect">
             <a:avLst/>
@@ -3589,7 +3936,7 @@
               <a:buNone/>
             </a:pPr>
             <a:r>
-              <a:rPr lang="en-US" sz="1000" dirty="0">
+              <a:rPr lang="en-US" sz="1050" dirty="0">
                 <a:solidFill>
                   <a:srgbClr val="F1F6F6"/>
                 </a:solidFill>
@@ -3597,39 +3944,22 @@
                 <a:ea typeface="Microsoft JhengHei" pitchFamily="34" charset="-122"/>
                 <a:cs typeface="Microsoft JhengHei" pitchFamily="34" charset="-120"/>
               </a:rPr>
-              <a:t>法規公告</a:t>
-            </a:r>
-            <a:endParaRPr lang="en-US" sz="1000" dirty="0"/>
-          </a:p>
-          <a:p>
-            <a:pPr algn="ctr" indent="0" marL="0">
-              <a:buNone/>
-            </a:pPr>
-            <a:r>
-              <a:rPr lang="en-US" sz="1000" dirty="0">
-                <a:solidFill>
-                  <a:srgbClr val="F1F6F6"/>
-                </a:solidFill>
-                <a:latin typeface="Microsoft JhengHei" pitchFamily="34" charset="0"/>
-                <a:ea typeface="Microsoft JhengHei" pitchFamily="34" charset="-122"/>
-                <a:cs typeface="Microsoft JhengHei" pitchFamily="34" charset="-120"/>
-              </a:rPr>
-              <a:t>FAQ、手冊</a:t>
-            </a:r>
-            <a:endParaRPr lang="en-US" sz="1000" dirty="0"/>
-          </a:p>
-        </p:txBody>
-      </p:sp>
-      <p:sp>
-        <p:nvSpPr>
-          <p:cNvPr id="20" name="Shape 18"/>
+              <a:t>人再確認</a:t>
+            </a:r>
+            <a:endParaRPr lang="en-US" sz="1050" dirty="0"/>
+          </a:p>
+        </p:txBody>
+      </p:sp>
+      <p:sp>
+        <p:nvSpPr>
+          <p:cNvPr id="29" name="Shape 27"/>
           <p:cNvSpPr/>
           <p:nvPr/>
         </p:nvSpPr>
         <p:spPr>
           <a:xfrm>
-            <a:off x="3566160" y="2724912"/>
-            <a:ext cx="256032" cy="0"/>
+            <a:off x="7086600" y="4091940"/>
+            <a:ext cx="320040" cy="0"/>
           </a:xfrm>
           <a:prstGeom prst="line">
             <a:avLst/>
@@ -3646,224 +3976,14 @@
       </p:sp>
       <p:sp>
         <p:nvSpPr>
-          <p:cNvPr id="21" name="Shape 19"/>
+          <p:cNvPr id="30" name="Shape 28"/>
           <p:cNvSpPr/>
           <p:nvPr/>
         </p:nvSpPr>
         <p:spPr>
           <a:xfrm>
-            <a:off x="3822192" y="2359152"/>
-            <a:ext cx="1417320" cy="731520"/>
-          </a:xfrm>
-          <a:prstGeom prst="rect">
-            <a:avLst/>
-          </a:prstGeom>
-          <a:solidFill>
-            <a:srgbClr val="121A1D"/>
-          </a:solidFill>
-          <a:ln w="12700">
-            <a:solidFill>
-              <a:srgbClr val="2A3B42"/>
-            </a:solidFill>
-            <a:prstDash val="solid"/>
-          </a:ln>
-        </p:spPr>
-      </p:sp>
-      <p:sp>
-        <p:nvSpPr>
-          <p:cNvPr id="22" name="Text 20"/>
-          <p:cNvSpPr txBox="1"/>
-          <p:nvPr/>
-        </p:nvSpPr>
-        <p:spPr>
-          <a:xfrm>
-            <a:off x="3822192" y="2359152"/>
-            <a:ext cx="1417320" cy="731520"/>
-          </a:xfrm>
-          <a:prstGeom prst="rect">
-            <a:avLst/>
-          </a:prstGeom>
-          <a:noFill/>
-          <a:ln/>
-        </p:spPr>
-        <p:txBody>
-          <a:bodyPr wrap="square" lIns="0" tIns="0" rIns="0" bIns="0" rtlCol="0" anchor="ctr"/>
-          <a:lstStyle/>
-          <a:p>
-            <a:pPr algn="ctr" indent="0" marL="0">
-              <a:buNone/>
-            </a:pPr>
-            <a:r>
-              <a:rPr lang="en-US" sz="1000" dirty="0">
-                <a:solidFill>
-                  <a:srgbClr val="F1F6F6"/>
-                </a:solidFill>
-                <a:latin typeface="Microsoft JhengHei" pitchFamily="34" charset="0"/>
-                <a:ea typeface="Microsoft JhengHei" pitchFamily="34" charset="-122"/>
-                <a:cs typeface="Microsoft JhengHei" pitchFamily="34" charset="-120"/>
-              </a:rPr>
-              <a:t>混合檢索</a:t>
-            </a:r>
-            <a:endParaRPr lang="en-US" sz="1000" dirty="0"/>
-          </a:p>
-          <a:p>
-            <a:pPr algn="ctr" indent="0" marL="0">
-              <a:buNone/>
-            </a:pPr>
-            <a:r>
-              <a:rPr lang="en-US" sz="1000" dirty="0">
-                <a:solidFill>
-                  <a:srgbClr val="F1F6F6"/>
-                </a:solidFill>
-                <a:latin typeface="Microsoft JhengHei" pitchFamily="34" charset="0"/>
-                <a:ea typeface="Microsoft JhengHei" pitchFamily="34" charset="-122"/>
-                <a:cs typeface="Microsoft JhengHei" pitchFamily="34" charset="-120"/>
-              </a:rPr>
-              <a:t>＋ Rerank</a:t>
-            </a:r>
-            <a:endParaRPr lang="en-US" sz="1000" dirty="0"/>
-          </a:p>
-        </p:txBody>
-      </p:sp>
-      <p:sp>
-        <p:nvSpPr>
-          <p:cNvPr id="23" name="Shape 21"/>
-          <p:cNvSpPr/>
-          <p:nvPr/>
-        </p:nvSpPr>
-        <p:spPr>
-          <a:xfrm>
-            <a:off x="5239512" y="2724912"/>
-            <a:ext cx="256032" cy="0"/>
-          </a:xfrm>
-          <a:prstGeom prst="line">
-            <a:avLst/>
-          </a:prstGeom>
-          <a:noFill/>
-          <a:ln w="15875">
-            <a:solidFill>
-              <a:srgbClr val="0ABAB5"/>
-            </a:solidFill>
-            <a:prstDash val="solid"/>
-            <a:tailEnd type="triangle"/>
-          </a:ln>
-        </p:spPr>
-      </p:sp>
-      <p:sp>
-        <p:nvSpPr>
-          <p:cNvPr id="24" name="Shape 22"/>
-          <p:cNvSpPr/>
-          <p:nvPr/>
-        </p:nvSpPr>
-        <p:spPr>
-          <a:xfrm>
-            <a:off x="5495544" y="2359152"/>
-            <a:ext cx="1417320" cy="731520"/>
-          </a:xfrm>
-          <a:prstGeom prst="rect">
-            <a:avLst/>
-          </a:prstGeom>
-          <a:solidFill>
-            <a:srgbClr val="121A1D"/>
-          </a:solidFill>
-          <a:ln w="12700">
-            <a:solidFill>
-              <a:srgbClr val="2A3B42"/>
-            </a:solidFill>
-            <a:prstDash val="solid"/>
-          </a:ln>
-        </p:spPr>
-      </p:sp>
-      <p:sp>
-        <p:nvSpPr>
-          <p:cNvPr id="25" name="Text 23"/>
-          <p:cNvSpPr txBox="1"/>
-          <p:nvPr/>
-        </p:nvSpPr>
-        <p:spPr>
-          <a:xfrm>
-            <a:off x="5495544" y="2359152"/>
-            <a:ext cx="1417320" cy="731520"/>
-          </a:xfrm>
-          <a:prstGeom prst="rect">
-            <a:avLst/>
-          </a:prstGeom>
-          <a:noFill/>
-          <a:ln/>
-        </p:spPr>
-        <p:txBody>
-          <a:bodyPr wrap="square" lIns="0" tIns="0" rIns="0" bIns="0" rtlCol="0" anchor="ctr"/>
-          <a:lstStyle/>
-          <a:p>
-            <a:pPr algn="ctr" indent="0" marL="0">
-              <a:buNone/>
-            </a:pPr>
-            <a:r>
-              <a:rPr lang="en-US" sz="1000" dirty="0">
-                <a:solidFill>
-                  <a:srgbClr val="F1F6F6"/>
-                </a:solidFill>
-                <a:latin typeface="Microsoft JhengHei" pitchFamily="34" charset="0"/>
-                <a:ea typeface="Microsoft JhengHei" pitchFamily="34" charset="-122"/>
-                <a:cs typeface="Microsoft JhengHei" pitchFamily="34" charset="-120"/>
-              </a:rPr>
-              <a:t>附來源回答</a:t>
-            </a:r>
-            <a:endParaRPr lang="en-US" sz="1000" dirty="0"/>
-          </a:p>
-          <a:p>
-            <a:pPr algn="ctr" indent="0" marL="0">
-              <a:buNone/>
-            </a:pPr>
-            <a:r>
-              <a:rPr lang="en-US" sz="1000" dirty="0">
-                <a:solidFill>
-                  <a:srgbClr val="F1F6F6"/>
-                </a:solidFill>
-                <a:latin typeface="Microsoft JhengHei" pitchFamily="34" charset="0"/>
-                <a:ea typeface="Microsoft JhengHei" pitchFamily="34" charset="-122"/>
-                <a:cs typeface="Microsoft JhengHei" pitchFamily="34" charset="-120"/>
-              </a:rPr>
-              <a:t>找不到就說</a:t>
-            </a:r>
-            <a:endParaRPr lang="en-US" sz="1000" dirty="0"/>
-          </a:p>
-        </p:txBody>
-      </p:sp>
-      <p:sp>
-        <p:nvSpPr>
-          <p:cNvPr id="26" name="Shape 24"/>
-          <p:cNvSpPr/>
-          <p:nvPr/>
-        </p:nvSpPr>
-        <p:spPr>
-          <a:xfrm>
-            <a:off x="6912864" y="2724912"/>
-            <a:ext cx="256032" cy="0"/>
-          </a:xfrm>
-          <a:prstGeom prst="line">
-            <a:avLst/>
-          </a:prstGeom>
-          <a:noFill/>
-          <a:ln w="15875">
-            <a:solidFill>
-              <a:srgbClr val="0ABAB5"/>
-            </a:solidFill>
-            <a:prstDash val="solid"/>
-            <a:tailEnd type="triangle"/>
-          </a:ln>
-        </p:spPr>
-      </p:sp>
-      <p:sp>
-        <p:nvSpPr>
-          <p:cNvPr id="27" name="Shape 25"/>
-          <p:cNvSpPr/>
-          <p:nvPr/>
-        </p:nvSpPr>
-        <p:spPr>
-          <a:xfrm>
-            <a:off x="7168896" y="2359152"/>
-            <a:ext cx="1417320" cy="731520"/>
+            <a:off x="7406640" y="3840480"/>
+            <a:ext cx="1280160" cy="502920"/>
           </a:xfrm>
           <a:prstGeom prst="rect">
             <a:avLst/>
@@ -3881,14 +4001,14 @@
       </p:sp>
       <p:sp>
         <p:nvSpPr>
-          <p:cNvPr id="28" name="Text 26"/>
-          <p:cNvSpPr txBox="1"/>
-          <p:nvPr/>
-        </p:nvSpPr>
-        <p:spPr>
-          <a:xfrm>
-            <a:off x="7168896" y="2359152"/>
-            <a:ext cx="1417320" cy="731520"/>
+          <p:cNvPr id="31" name="Text 29"/>
+          <p:cNvSpPr txBox="1"/>
+          <p:nvPr/>
+        </p:nvSpPr>
+        <p:spPr>
+          <a:xfrm>
+            <a:off x="7406640" y="3840480"/>
+            <a:ext cx="1280160" cy="502920"/>
           </a:xfrm>
           <a:prstGeom prst="rect">
             <a:avLst/>
@@ -3904,506 +4024,15 @@
               <a:buNone/>
             </a:pPr>
             <a:r>
-              <a:rPr lang="en-US" sz="1000" dirty="0">
+              <a:rPr lang="en-US" sz="1000" b="1" dirty="0">
                 <a:solidFill>
                   <a:srgbClr val="F1F6F6"/>
                 </a:solidFill>
-                <a:latin typeface="Microsoft JhengHei" pitchFamily="34" charset="0"/>
-                <a:ea typeface="Microsoft JhengHei" pitchFamily="34" charset="-122"/>
-                <a:cs typeface="Microsoft JhengHei" pitchFamily="34" charset="-120"/>
-              </a:rPr>
-              <a:t>固定測試集</a:t>
-            </a:r>
-            <a:endParaRPr lang="en-US" sz="1000" dirty="0"/>
-          </a:p>
-          <a:p>
-            <a:pPr algn="ctr" indent="0" marL="0">
-              <a:buNone/>
-            </a:pPr>
-            <a:r>
-              <a:rPr lang="en-US" sz="1000" dirty="0">
-                <a:solidFill>
-                  <a:srgbClr val="F1F6F6"/>
-                </a:solidFill>
-                <a:latin typeface="Microsoft JhengHei" pitchFamily="34" charset="0"/>
-                <a:ea typeface="Microsoft JhengHei" pitchFamily="34" charset="-122"/>
-                <a:cs typeface="Microsoft JhengHei" pitchFamily="34" charset="-120"/>
-              </a:rPr>
-              <a:t>持續評估</a:t>
-            </a:r>
-            <a:endParaRPr lang="en-US" sz="1000" dirty="0"/>
-          </a:p>
-        </p:txBody>
-      </p:sp>
-      <p:sp>
-        <p:nvSpPr>
-          <p:cNvPr id="29" name="Text 27"/>
-          <p:cNvSpPr txBox="1"/>
-          <p:nvPr/>
-        </p:nvSpPr>
-        <p:spPr>
-          <a:xfrm>
-            <a:off x="457200" y="3392424"/>
-            <a:ext cx="1645920" cy="822960"/>
-          </a:xfrm>
-          <a:prstGeom prst="rect">
-            <a:avLst/>
-          </a:prstGeom>
-          <a:noFill/>
-          <a:ln/>
-        </p:spPr>
-        <p:txBody>
-          <a:bodyPr wrap="square" lIns="0" tIns="0" rIns="0" bIns="0" rtlCol="0" anchor="ctr"/>
-          <a:lstStyle/>
-          <a:p>
-            <a:pPr indent="0" marL="0">
-              <a:buNone/>
-            </a:pPr>
-            <a:r>
-              <a:rPr lang="en-US" sz="1250" b="1" dirty="0">
-                <a:solidFill>
-                  <a:srgbClr val="0ABAB5"/>
-                </a:solidFill>
-                <a:latin typeface="Microsoft JhengHei" pitchFamily="34" charset="0"/>
-                <a:ea typeface="Microsoft JhengHei" pitchFamily="34" charset="-122"/>
-                <a:cs typeface="Microsoft JhengHei" pitchFamily="34" charset="-120"/>
-              </a:rPr>
-              <a:t>內部系統工具化</a:t>
-            </a:r>
-            <a:endParaRPr lang="en-US" sz="1250" dirty="0"/>
-          </a:p>
-        </p:txBody>
-      </p:sp>
-      <p:sp>
-        <p:nvSpPr>
-          <p:cNvPr id="30" name="Shape 28"/>
-          <p:cNvSpPr/>
-          <p:nvPr/>
-        </p:nvSpPr>
-        <p:spPr>
-          <a:xfrm>
-            <a:off x="2148840" y="3438144"/>
-            <a:ext cx="1417320" cy="731520"/>
-          </a:xfrm>
-          <a:prstGeom prst="rect">
-            <a:avLst/>
-          </a:prstGeom>
-          <a:solidFill>
-            <a:srgbClr val="121A1D"/>
-          </a:solidFill>
-          <a:ln w="12700">
-            <a:solidFill>
-              <a:srgbClr val="2A3B42"/>
-            </a:solidFill>
-            <a:prstDash val="solid"/>
-          </a:ln>
-        </p:spPr>
-      </p:sp>
-      <p:sp>
-        <p:nvSpPr>
-          <p:cNvPr id="31" name="Text 29"/>
-          <p:cNvSpPr txBox="1"/>
-          <p:nvPr/>
-        </p:nvSpPr>
-        <p:spPr>
-          <a:xfrm>
-            <a:off x="2148840" y="3438144"/>
-            <a:ext cx="1417320" cy="731520"/>
-          </a:xfrm>
-          <a:prstGeom prst="rect">
-            <a:avLst/>
-          </a:prstGeom>
-          <a:noFill/>
-          <a:ln/>
-        </p:spPr>
-        <p:txBody>
-          <a:bodyPr wrap="square" lIns="0" tIns="0" rIns="0" bIns="0" rtlCol="0" anchor="ctr"/>
-          <a:lstStyle/>
-          <a:p>
-            <a:pPr algn="ctr" indent="0" marL="0">
-              <a:buNone/>
-            </a:pPr>
-            <a:r>
-              <a:rPr lang="en-US" sz="1000" dirty="0">
-                <a:solidFill>
-                  <a:srgbClr val="F1F6F6"/>
-                </a:solidFill>
-                <a:latin typeface="Microsoft JhengHei" pitchFamily="34" charset="0"/>
-                <a:ea typeface="Microsoft JhengHei" pitchFamily="34" charset="-122"/>
-                <a:cs typeface="Microsoft JhengHei" pitchFamily="34" charset="-120"/>
-              </a:rPr>
-              <a:t>發票查詢</a:t>
-            </a:r>
-            <a:endParaRPr lang="en-US" sz="1000" dirty="0"/>
-          </a:p>
-          <a:p>
-            <a:pPr algn="ctr" indent="0" marL="0">
-              <a:buNone/>
-            </a:pPr>
-            <a:r>
-              <a:rPr lang="en-US" sz="1000" dirty="0">
-                <a:solidFill>
-                  <a:srgbClr val="F1F6F6"/>
-                </a:solidFill>
-                <a:latin typeface="Microsoft JhengHei" pitchFamily="34" charset="0"/>
-                <a:ea typeface="Microsoft JhengHei" pitchFamily="34" charset="-122"/>
-                <a:cs typeface="Microsoft JhengHei" pitchFamily="34" charset="-120"/>
-              </a:rPr>
-              <a:t>字軌檢核</a:t>
-            </a:r>
-            <a:endParaRPr lang="en-US" sz="1000" dirty="0"/>
-          </a:p>
-        </p:txBody>
-      </p:sp>
-      <p:sp>
-        <p:nvSpPr>
-          <p:cNvPr id="32" name="Shape 30"/>
-          <p:cNvSpPr/>
-          <p:nvPr/>
-        </p:nvSpPr>
-        <p:spPr>
-          <a:xfrm>
-            <a:off x="3566160" y="3803904"/>
-            <a:ext cx="256032" cy="0"/>
-          </a:xfrm>
-          <a:prstGeom prst="line">
-            <a:avLst/>
-          </a:prstGeom>
-          <a:noFill/>
-          <a:ln w="15875">
-            <a:solidFill>
-              <a:srgbClr val="0ABAB5"/>
-            </a:solidFill>
-            <a:prstDash val="solid"/>
-            <a:tailEnd type="triangle"/>
-          </a:ln>
-        </p:spPr>
-      </p:sp>
-      <p:sp>
-        <p:nvSpPr>
-          <p:cNvPr id="33" name="Shape 31"/>
-          <p:cNvSpPr/>
-          <p:nvPr/>
-        </p:nvSpPr>
-        <p:spPr>
-          <a:xfrm>
-            <a:off x="3822192" y="3438144"/>
-            <a:ext cx="1417320" cy="731520"/>
-          </a:xfrm>
-          <a:prstGeom prst="rect">
-            <a:avLst/>
-          </a:prstGeom>
-          <a:solidFill>
-            <a:srgbClr val="121A1D"/>
-          </a:solidFill>
-          <a:ln w="12700">
-            <a:solidFill>
-              <a:srgbClr val="2A3B42"/>
-            </a:solidFill>
-            <a:prstDash val="solid"/>
-          </a:ln>
-        </p:spPr>
-      </p:sp>
-      <p:sp>
-        <p:nvSpPr>
-          <p:cNvPr id="34" name="Text 32"/>
-          <p:cNvSpPr txBox="1"/>
-          <p:nvPr/>
-        </p:nvSpPr>
-        <p:spPr>
-          <a:xfrm>
-            <a:off x="3822192" y="3438144"/>
-            <a:ext cx="1417320" cy="731520"/>
-          </a:xfrm>
-          <a:prstGeom prst="rect">
-            <a:avLst/>
-          </a:prstGeom>
-          <a:noFill/>
-          <a:ln/>
-        </p:spPr>
-        <p:txBody>
-          <a:bodyPr wrap="square" lIns="0" tIns="0" rIns="0" bIns="0" rtlCol="0" anchor="ctr"/>
-          <a:lstStyle/>
-          <a:p>
-            <a:pPr algn="ctr" indent="0" marL="0">
-              <a:buNone/>
-            </a:pPr>
-            <a:r>
-              <a:rPr lang="en-US" sz="1000" dirty="0">
-                <a:solidFill>
-                  <a:srgbClr val="F1F6F6"/>
-                </a:solidFill>
-                <a:latin typeface="Microsoft JhengHei" pitchFamily="34" charset="0"/>
-                <a:ea typeface="Microsoft JhengHei" pitchFamily="34" charset="-122"/>
-                <a:cs typeface="Microsoft JhengHei" pitchFamily="34" charset="-120"/>
-              </a:rPr>
-              <a:t>包成</a:t>
-            </a:r>
-            <a:endParaRPr lang="en-US" sz="1000" dirty="0"/>
-          </a:p>
-          <a:p>
-            <a:pPr algn="ctr" indent="0" marL="0">
-              <a:buNone/>
-            </a:pPr>
-            <a:r>
-              <a:rPr lang="en-US" sz="1000" dirty="0">
-                <a:solidFill>
-                  <a:srgbClr val="F1F6F6"/>
-                </a:solidFill>
-                <a:latin typeface="Microsoft JhengHei" pitchFamily="34" charset="0"/>
-                <a:ea typeface="Microsoft JhengHei" pitchFamily="34" charset="-122"/>
-                <a:cs typeface="Microsoft JhengHei" pitchFamily="34" charset="-120"/>
-              </a:rPr>
-              <a:t>MCP Server</a:t>
-            </a:r>
-            <a:endParaRPr lang="en-US" sz="1000" dirty="0"/>
-          </a:p>
-        </p:txBody>
-      </p:sp>
-      <p:sp>
-        <p:nvSpPr>
-          <p:cNvPr id="35" name="Shape 33"/>
-          <p:cNvSpPr/>
-          <p:nvPr/>
-        </p:nvSpPr>
-        <p:spPr>
-          <a:xfrm>
-            <a:off x="5239512" y="3803904"/>
-            <a:ext cx="256032" cy="0"/>
-          </a:xfrm>
-          <a:prstGeom prst="line">
-            <a:avLst/>
-          </a:prstGeom>
-          <a:noFill/>
-          <a:ln w="15875">
-            <a:solidFill>
-              <a:srgbClr val="0ABAB5"/>
-            </a:solidFill>
-            <a:prstDash val="solid"/>
-            <a:tailEnd type="triangle"/>
-          </a:ln>
-        </p:spPr>
-      </p:sp>
-      <p:sp>
-        <p:nvSpPr>
-          <p:cNvPr id="36" name="Shape 34"/>
-          <p:cNvSpPr/>
-          <p:nvPr/>
-        </p:nvSpPr>
-        <p:spPr>
-          <a:xfrm>
-            <a:off x="5495544" y="3438144"/>
-            <a:ext cx="1417320" cy="731520"/>
-          </a:xfrm>
-          <a:prstGeom prst="rect">
-            <a:avLst/>
-          </a:prstGeom>
-          <a:solidFill>
-            <a:srgbClr val="121A1D"/>
-          </a:solidFill>
-          <a:ln w="12700">
-            <a:solidFill>
-              <a:srgbClr val="2A3B42"/>
-            </a:solidFill>
-            <a:prstDash val="solid"/>
-          </a:ln>
-        </p:spPr>
-      </p:sp>
-      <p:sp>
-        <p:nvSpPr>
-          <p:cNvPr id="37" name="Text 35"/>
-          <p:cNvSpPr txBox="1"/>
-          <p:nvPr/>
-        </p:nvSpPr>
-        <p:spPr>
-          <a:xfrm>
-            <a:off x="5495544" y="3438144"/>
-            <a:ext cx="1417320" cy="731520"/>
-          </a:xfrm>
-          <a:prstGeom prst="rect">
-            <a:avLst/>
-          </a:prstGeom>
-          <a:noFill/>
-          <a:ln/>
-        </p:spPr>
-        <p:txBody>
-          <a:bodyPr wrap="square" lIns="0" tIns="0" rIns="0" bIns="0" rtlCol="0" anchor="ctr"/>
-          <a:lstStyle/>
-          <a:p>
-            <a:pPr algn="ctr" indent="0" marL="0">
-              <a:buNone/>
-            </a:pPr>
-            <a:r>
-              <a:rPr lang="en-US" sz="1000" dirty="0">
-                <a:solidFill>
-                  <a:srgbClr val="F1F6F6"/>
-                </a:solidFill>
-                <a:latin typeface="Microsoft JhengHei" pitchFamily="34" charset="0"/>
-                <a:ea typeface="Microsoft JhengHei" pitchFamily="34" charset="-122"/>
-                <a:cs typeface="Microsoft JhengHei" pitchFamily="34" charset="-120"/>
-              </a:rPr>
-              <a:t>Agent 依需求</a:t>
-            </a:r>
-            <a:endParaRPr lang="en-US" sz="1000" dirty="0"/>
-          </a:p>
-          <a:p>
-            <a:pPr algn="ctr" indent="0" marL="0">
-              <a:buNone/>
-            </a:pPr>
-            <a:r>
-              <a:rPr lang="en-US" sz="1000" dirty="0">
-                <a:solidFill>
-                  <a:srgbClr val="F1F6F6"/>
-                </a:solidFill>
-                <a:latin typeface="Microsoft JhengHei" pitchFamily="34" charset="0"/>
-                <a:ea typeface="Microsoft JhengHei" pitchFamily="34" charset="-122"/>
-                <a:cs typeface="Microsoft JhengHei" pitchFamily="34" charset="-120"/>
-              </a:rPr>
-              <a:t>呼叫工具</a:t>
-            </a:r>
-            <a:endParaRPr lang="en-US" sz="1000" dirty="0"/>
-          </a:p>
-        </p:txBody>
-      </p:sp>
-      <p:sp>
-        <p:nvSpPr>
-          <p:cNvPr id="38" name="Shape 36"/>
-          <p:cNvSpPr/>
-          <p:nvPr/>
-        </p:nvSpPr>
-        <p:spPr>
-          <a:xfrm>
-            <a:off x="6912864" y="3803904"/>
-            <a:ext cx="256032" cy="0"/>
-          </a:xfrm>
-          <a:prstGeom prst="line">
-            <a:avLst/>
-          </a:prstGeom>
-          <a:noFill/>
-          <a:ln w="15875">
-            <a:solidFill>
-              <a:srgbClr val="0ABAB5"/>
-            </a:solidFill>
-            <a:prstDash val="solid"/>
-            <a:tailEnd type="triangle"/>
-          </a:ln>
-        </p:spPr>
-      </p:sp>
-      <p:sp>
-        <p:nvSpPr>
-          <p:cNvPr id="39" name="Shape 37"/>
-          <p:cNvSpPr/>
-          <p:nvPr/>
-        </p:nvSpPr>
-        <p:spPr>
-          <a:xfrm>
-            <a:off x="7168896" y="3438144"/>
-            <a:ext cx="1417320" cy="731520"/>
-          </a:xfrm>
-          <a:prstGeom prst="rect">
-            <a:avLst/>
-          </a:prstGeom>
-          <a:solidFill>
-            <a:srgbClr val="16232A"/>
-          </a:solidFill>
-          <a:ln w="12700">
-            <a:solidFill>
-              <a:srgbClr val="0ABAB5"/>
-            </a:solidFill>
-            <a:prstDash val="solid"/>
-          </a:ln>
-        </p:spPr>
-      </p:sp>
-      <p:sp>
-        <p:nvSpPr>
-          <p:cNvPr id="40" name="Text 38"/>
-          <p:cNvSpPr txBox="1"/>
-          <p:nvPr/>
-        </p:nvSpPr>
-        <p:spPr>
-          <a:xfrm>
-            <a:off x="7168896" y="3438144"/>
-            <a:ext cx="1417320" cy="731520"/>
-          </a:xfrm>
-          <a:prstGeom prst="rect">
-            <a:avLst/>
-          </a:prstGeom>
-          <a:noFill/>
-          <a:ln/>
-        </p:spPr>
-        <p:txBody>
-          <a:bodyPr wrap="square" lIns="0" tIns="0" rIns="0" bIns="0" rtlCol="0" anchor="ctr"/>
-          <a:lstStyle/>
-          <a:p>
-            <a:pPr algn="ctr" indent="0" marL="0">
-              <a:buNone/>
-            </a:pPr>
-            <a:r>
-              <a:rPr lang="en-US" sz="1000" dirty="0">
-                <a:solidFill>
-                  <a:srgbClr val="F1F6F6"/>
-                </a:solidFill>
-                <a:latin typeface="Microsoft JhengHei" pitchFamily="34" charset="0"/>
-                <a:ea typeface="Microsoft JhengHei" pitchFamily="34" charset="-122"/>
-                <a:cs typeface="Microsoft JhengHei" pitchFamily="34" charset="-120"/>
-              </a:rPr>
-              <a:t>寫入類動作</a:t>
-            </a:r>
-            <a:endParaRPr lang="en-US" sz="1000" dirty="0"/>
-          </a:p>
-          <a:p>
-            <a:pPr algn="ctr" indent="0" marL="0">
-              <a:buNone/>
-            </a:pPr>
-            <a:r>
-              <a:rPr lang="en-US" sz="1000" dirty="0">
-                <a:solidFill>
-                  <a:srgbClr val="F1F6F6"/>
-                </a:solidFill>
-                <a:latin typeface="Microsoft JhengHei" pitchFamily="34" charset="0"/>
-                <a:ea typeface="Microsoft JhengHei" pitchFamily="34" charset="-122"/>
-                <a:cs typeface="Microsoft JhengHei" pitchFamily="34" charset="-120"/>
-              </a:rPr>
-              <a:t>人工確認</a:t>
-            </a:r>
-            <a:endParaRPr lang="en-US" sz="1000" dirty="0"/>
-          </a:p>
-        </p:txBody>
-      </p:sp>
-      <p:sp>
-        <p:nvSpPr>
-          <p:cNvPr id="41" name="Text 39"/>
-          <p:cNvSpPr txBox="1"/>
-          <p:nvPr/>
-        </p:nvSpPr>
-        <p:spPr>
-          <a:xfrm>
-            <a:off x="457200" y="4526280"/>
-            <a:ext cx="8229600" cy="274320"/>
-          </a:xfrm>
-          <a:prstGeom prst="rect">
-            <a:avLst/>
-          </a:prstGeom>
-          <a:noFill/>
-          <a:ln/>
-        </p:spPr>
-        <p:txBody>
-          <a:bodyPr wrap="square" lIns="0" tIns="0" rIns="0" bIns="0" rtlCol="0" anchor="t"/>
-          <a:lstStyle/>
-          <a:p>
-            <a:pPr indent="0" marL="0">
-              <a:buNone/>
-            </a:pPr>
-            <a:r>
-              <a:rPr lang="en-US" sz="1000" dirty="0">
-                <a:solidFill>
-                  <a:srgbClr val="6F8083"/>
-                </a:solidFill>
-                <a:latin typeface="Microsoft JhengHei" pitchFamily="34" charset="0"/>
-                <a:ea typeface="Microsoft JhengHei" pitchFamily="34" charset="-122"/>
-                <a:cs typeface="Microsoft JhengHei" pitchFamily="34" charset="-120"/>
-              </a:rPr>
-              <a:t>這是依官網與職缺公開資訊的推想，想聽團隊實際的優先順序與限制。</a:t>
+                <a:latin typeface="Consolas" pitchFamily="34" charset="0"/>
+                <a:ea typeface="Consolas" pitchFamily="34" charset="-122"/>
+                <a:cs typeface="Consolas" pitchFamily="34" charset="-120"/>
+              </a:rPr>
+              <a:t>Human-in-the-loop</a:t>
             </a:r>
             <a:endParaRPr lang="en-US" sz="1000" dirty="0"/>
           </a:p>
@@ -4474,7 +4103,7 @@
                 <a:ea typeface="Consolas" pitchFamily="34" charset="-122"/>
                 <a:cs typeface="Consolas" pitchFamily="34" charset="-120"/>
               </a:rPr>
-              <a:t>GROWTH PLAN</a:t>
+              <a:t>IDEAS · 依公開資訊推想</a:t>
             </a:r>
             <a:endParaRPr lang="en-US" sz="900" dirty="0"/>
           </a:p>
@@ -4513,7 +4142,7 @@
                 <a:ea typeface="Consolas" pitchFamily="34" charset="-122"/>
                 <a:cs typeface="Consolas" pitchFamily="34" charset="-120"/>
               </a:rPr>
-              <a:t>11 / 12</a:t>
+              <a:t>11 / 13</a:t>
             </a:r>
             <a:endParaRPr lang="en-US" sz="900" dirty="0"/>
           </a:p>
@@ -4552,7 +4181,7 @@
                 <a:ea typeface="Microsoft JhengHei" pitchFamily="34" charset="-122"/>
                 <a:cs typeface="Microsoft JhengHei" pitchFamily="34" charset="-120"/>
               </a:rPr>
-              <a:t>誠實的缺口，與前 90 天的計畫</a:t>
+              <a:t>我對 AI 落地的初步想法</a:t>
             </a:r>
             <a:endParaRPr lang="en-US" sz="2600" dirty="0"/>
           </a:p>
@@ -4566,34 +4195,34 @@
         </p:nvSpPr>
         <p:spPr>
           <a:xfrm>
-            <a:off x="457200" y="1188720"/>
-            <a:ext cx="3474720" cy="320040"/>
-          </a:xfrm>
-          <a:prstGeom prst="rect">
-            <a:avLst/>
-          </a:prstGeom>
-          <a:noFill/>
-          <a:ln/>
-        </p:spPr>
-        <p:txBody>
-          <a:bodyPr wrap="square" lIns="0" tIns="0" rIns="0" bIns="0" rtlCol="0" anchor="t"/>
+            <a:off x="457200" y="1234440"/>
+            <a:ext cx="1645920" cy="822960"/>
+          </a:xfrm>
+          <a:prstGeom prst="rect">
+            <a:avLst/>
+          </a:prstGeom>
+          <a:noFill/>
+          <a:ln/>
+        </p:spPr>
+        <p:txBody>
+          <a:bodyPr wrap="square" lIns="0" tIns="0" rIns="0" bIns="0" rtlCol="0" anchor="ctr"/>
           <a:lstStyle/>
           <a:p>
             <a:pPr indent="0" marL="0">
               <a:buNone/>
             </a:pPr>
             <a:r>
-              <a:rPr lang="en-US" sz="1400" b="1" dirty="0">
-                <a:solidFill>
-                  <a:srgbClr val="F1F6F6"/>
+              <a:rPr lang="en-US" sz="1250" b="1" dirty="0">
+                <a:solidFill>
+                  <a:srgbClr val="0ABAB5"/>
                 </a:solidFill>
                 <a:latin typeface="Microsoft JhengHei" pitchFamily="34" charset="0"/>
                 <a:ea typeface="Microsoft JhengHei" pitchFamily="34" charset="-122"/>
                 <a:cs typeface="Microsoft JhengHei" pitchFamily="34" charset="-120"/>
               </a:rPr>
-              <a:t>目前正在補強</a:t>
-            </a:r>
-            <a:endParaRPr lang="en-US" sz="1400" dirty="0"/>
+              <a:t>VAT 憑證辨識升級</a:t>
+            </a:r>
+            <a:endParaRPr lang="en-US" sz="1250" dirty="0"/>
           </a:p>
         </p:txBody>
       </p:sp>
@@ -4605,426 +4234,16 @@
         </p:nvSpPr>
         <p:spPr>
           <a:xfrm>
-            <a:off x="457200" y="1700784"/>
-            <a:ext cx="109728" cy="109728"/>
+            <a:off x="2148840" y="1280160"/>
+            <a:ext cx="1417320" cy="731520"/>
           </a:xfrm>
           <a:prstGeom prst="rect">
             <a:avLst/>
           </a:prstGeom>
           <a:solidFill>
-            <a:srgbClr val="E3A23B"/>
+            <a:srgbClr val="121A1D"/>
           </a:solidFill>
           <a:ln w="12700">
-            <a:solidFill>
-              <a:srgbClr val="E3A23B"/>
-            </a:solidFill>
-            <a:prstDash val="solid"/>
-          </a:ln>
-        </p:spPr>
-      </p:sp>
-      <p:sp>
-        <p:nvSpPr>
-          <p:cNvPr id="7" name="Text 5"/>
-          <p:cNvSpPr txBox="1"/>
-          <p:nvPr/>
-        </p:nvSpPr>
-        <p:spPr>
-          <a:xfrm>
-            <a:off x="713232" y="1627632"/>
-            <a:ext cx="3200400" cy="274320"/>
-          </a:xfrm>
-          <a:prstGeom prst="rect">
-            <a:avLst/>
-          </a:prstGeom>
-          <a:noFill/>
-          <a:ln/>
-        </p:spPr>
-        <p:txBody>
-          <a:bodyPr wrap="square" lIns="0" tIns="0" rIns="0" bIns="0" rtlCol="0" anchor="t"/>
-          <a:lstStyle/>
-          <a:p>
-            <a:pPr indent="0" marL="0">
-              <a:buNone/>
-            </a:pPr>
-            <a:r>
-              <a:rPr lang="en-US" sz="1200" b="1" dirty="0">
-                <a:solidFill>
-                  <a:srgbClr val="F1F6F6"/>
-                </a:solidFill>
-                <a:latin typeface="Microsoft JhengHei" pitchFamily="34" charset="0"/>
-                <a:ea typeface="Microsoft JhengHei" pitchFamily="34" charset="-122"/>
-                <a:cs typeface="Microsoft JhengHei" pitchFamily="34" charset="-120"/>
-              </a:rPr>
-              <a:t>RAG 上線實作</a:t>
-            </a:r>
-            <a:endParaRPr lang="en-US" sz="1200" dirty="0"/>
-          </a:p>
-        </p:txBody>
-      </p:sp>
-      <p:sp>
-        <p:nvSpPr>
-          <p:cNvPr id="8" name="Text 6"/>
-          <p:cNvSpPr txBox="1"/>
-          <p:nvPr/>
-        </p:nvSpPr>
-        <p:spPr>
-          <a:xfrm>
-            <a:off x="713232" y="1901952"/>
-            <a:ext cx="3291840" cy="411480"/>
-          </a:xfrm>
-          <a:prstGeom prst="rect">
-            <a:avLst/>
-          </a:prstGeom>
-          <a:noFill/>
-          <a:ln/>
-        </p:spPr>
-        <p:txBody>
-          <a:bodyPr wrap="square" lIns="0" tIns="0" rIns="0" bIns="0" rtlCol="0" anchor="t"/>
-          <a:lstStyle/>
-          <a:p>
-            <a:pPr indent="0" marL="0">
-              <a:buNone/>
-            </a:pPr>
-            <a:r>
-              <a:rPr lang="en-US" sz="1000" dirty="0">
-                <a:solidFill>
-                  <a:srgbClr val="9FB0B2"/>
-                </a:solidFill>
-                <a:latin typeface="Microsoft JhengHei" pitchFamily="34" charset="0"/>
-                <a:ea typeface="Microsoft JhengHei" pitchFamily="34" charset="-122"/>
-                <a:cs typeface="Microsoft JhengHei" pitchFamily="34" charset="-120"/>
-              </a:rPr>
-              <a:t>流程、chunk、混合檢索、rerank、評估指標已整理，接著做完整實作</a:t>
-            </a:r>
-            <a:endParaRPr lang="en-US" sz="1000" dirty="0"/>
-          </a:p>
-        </p:txBody>
-      </p:sp>
-      <p:sp>
-        <p:nvSpPr>
-          <p:cNvPr id="9" name="Shape 7"/>
-          <p:cNvSpPr/>
-          <p:nvPr/>
-        </p:nvSpPr>
-        <p:spPr>
-          <a:xfrm>
-            <a:off x="457200" y="2432304"/>
-            <a:ext cx="109728" cy="109728"/>
-          </a:xfrm>
-          <a:prstGeom prst="rect">
-            <a:avLst/>
-          </a:prstGeom>
-          <a:solidFill>
-            <a:srgbClr val="E3A23B"/>
-          </a:solidFill>
-          <a:ln w="12700">
-            <a:solidFill>
-              <a:srgbClr val="E3A23B"/>
-            </a:solidFill>
-            <a:prstDash val="solid"/>
-          </a:ln>
-        </p:spPr>
-      </p:sp>
-      <p:sp>
-        <p:nvSpPr>
-          <p:cNvPr id="10" name="Text 8"/>
-          <p:cNvSpPr txBox="1"/>
-          <p:nvPr/>
-        </p:nvSpPr>
-        <p:spPr>
-          <a:xfrm>
-            <a:off x="713232" y="2359152"/>
-            <a:ext cx="3200400" cy="274320"/>
-          </a:xfrm>
-          <a:prstGeom prst="rect">
-            <a:avLst/>
-          </a:prstGeom>
-          <a:noFill/>
-          <a:ln/>
-        </p:spPr>
-        <p:txBody>
-          <a:bodyPr wrap="square" lIns="0" tIns="0" rIns="0" bIns="0" rtlCol="0" anchor="t"/>
-          <a:lstStyle/>
-          <a:p>
-            <a:pPr indent="0" marL="0">
-              <a:buNone/>
-            </a:pPr>
-            <a:r>
-              <a:rPr lang="en-US" sz="1200" b="1" dirty="0">
-                <a:solidFill>
-                  <a:srgbClr val="F1F6F6"/>
-                </a:solidFill>
-                <a:latin typeface="Microsoft JhengHei" pitchFamily="34" charset="0"/>
-                <a:ea typeface="Microsoft JhengHei" pitchFamily="34" charset="-122"/>
-                <a:cs typeface="Microsoft JhengHei" pitchFamily="34" charset="-120"/>
-              </a:rPr>
-              <a:t>MCP ＋ LangGraph</a:t>
-            </a:r>
-            <a:endParaRPr lang="en-US" sz="1200" dirty="0"/>
-          </a:p>
-        </p:txBody>
-      </p:sp>
-      <p:sp>
-        <p:nvSpPr>
-          <p:cNvPr id="11" name="Text 9"/>
-          <p:cNvSpPr txBox="1"/>
-          <p:nvPr/>
-        </p:nvSpPr>
-        <p:spPr>
-          <a:xfrm>
-            <a:off x="713232" y="2633472"/>
-            <a:ext cx="3291840" cy="411480"/>
-          </a:xfrm>
-          <a:prstGeom prst="rect">
-            <a:avLst/>
-          </a:prstGeom>
-          <a:noFill/>
-          <a:ln/>
-        </p:spPr>
-        <p:txBody>
-          <a:bodyPr wrap="square" lIns="0" tIns="0" rIns="0" bIns="0" rtlCol="0" anchor="t"/>
-          <a:lstStyle/>
-          <a:p>
-            <a:pPr indent="0" marL="0">
-              <a:buNone/>
-            </a:pPr>
-            <a:r>
-              <a:rPr lang="en-US" sz="1000" dirty="0">
-                <a:solidFill>
-                  <a:srgbClr val="9FB0B2"/>
-                </a:solidFill>
-                <a:latin typeface="Microsoft JhengHei" pitchFamily="34" charset="0"/>
-                <a:ea typeface="Microsoft JhengHei" pitchFamily="34" charset="-122"/>
-                <a:cs typeface="Microsoft JhengHei" pitchFamily="34" charset="-120"/>
-              </a:rPr>
-              <a:t>理解 Host / Client / Server 與 State / Node / Edge，動手寫 MCP Server</a:t>
-            </a:r>
-            <a:endParaRPr lang="en-US" sz="1000" dirty="0"/>
-          </a:p>
-        </p:txBody>
-      </p:sp>
-      <p:sp>
-        <p:nvSpPr>
-          <p:cNvPr id="12" name="Shape 10"/>
-          <p:cNvSpPr/>
-          <p:nvPr/>
-        </p:nvSpPr>
-        <p:spPr>
-          <a:xfrm>
-            <a:off x="457200" y="3163824"/>
-            <a:ext cx="109728" cy="109728"/>
-          </a:xfrm>
-          <a:prstGeom prst="rect">
-            <a:avLst/>
-          </a:prstGeom>
-          <a:solidFill>
-            <a:srgbClr val="E3A23B"/>
-          </a:solidFill>
-          <a:ln w="12700">
-            <a:solidFill>
-              <a:srgbClr val="E3A23B"/>
-            </a:solidFill>
-            <a:prstDash val="solid"/>
-          </a:ln>
-        </p:spPr>
-      </p:sp>
-      <p:sp>
-        <p:nvSpPr>
-          <p:cNvPr id="13" name="Text 11"/>
-          <p:cNvSpPr txBox="1"/>
-          <p:nvPr/>
-        </p:nvSpPr>
-        <p:spPr>
-          <a:xfrm>
-            <a:off x="713232" y="3090672"/>
-            <a:ext cx="3200400" cy="274320"/>
-          </a:xfrm>
-          <a:prstGeom prst="rect">
-            <a:avLst/>
-          </a:prstGeom>
-          <a:noFill/>
-          <a:ln/>
-        </p:spPr>
-        <p:txBody>
-          <a:bodyPr wrap="square" lIns="0" tIns="0" rIns="0" bIns="0" rtlCol="0" anchor="t"/>
-          <a:lstStyle/>
-          <a:p>
-            <a:pPr indent="0" marL="0">
-              <a:buNone/>
-            </a:pPr>
-            <a:r>
-              <a:rPr lang="en-US" sz="1200" b="1" dirty="0">
-                <a:solidFill>
-                  <a:srgbClr val="F1F6F6"/>
-                </a:solidFill>
-                <a:latin typeface="Microsoft JhengHei" pitchFamily="34" charset="0"/>
-                <a:ea typeface="Microsoft JhengHei" pitchFamily="34" charset="-122"/>
-                <a:cs typeface="Microsoft JhengHei" pitchFamily="34" charset="-120"/>
-              </a:rPr>
-              <a:t>PostgreSQL ＋ pgvector</a:t>
-            </a:r>
-            <a:endParaRPr lang="en-US" sz="1200" dirty="0"/>
-          </a:p>
-        </p:txBody>
-      </p:sp>
-      <p:sp>
-        <p:nvSpPr>
-          <p:cNvPr id="14" name="Text 12"/>
-          <p:cNvSpPr txBox="1"/>
-          <p:nvPr/>
-        </p:nvSpPr>
-        <p:spPr>
-          <a:xfrm>
-            <a:off x="713232" y="3364992"/>
-            <a:ext cx="3291840" cy="411480"/>
-          </a:xfrm>
-          <a:prstGeom prst="rect">
-            <a:avLst/>
-          </a:prstGeom>
-          <a:noFill/>
-          <a:ln/>
-        </p:spPr>
-        <p:txBody>
-          <a:bodyPr wrap="square" lIns="0" tIns="0" rIns="0" bIns="0" rtlCol="0" anchor="t"/>
-          <a:lstStyle/>
-          <a:p>
-            <a:pPr indent="0" marL="0">
-              <a:buNone/>
-            </a:pPr>
-            <a:r>
-              <a:rPr lang="en-US" sz="1000" dirty="0">
-                <a:solidFill>
-                  <a:srgbClr val="9FB0B2"/>
-                </a:solidFill>
-                <a:latin typeface="Microsoft JhengHei" pitchFamily="34" charset="0"/>
-                <a:ea typeface="Microsoft JhengHei" pitchFamily="34" charset="-122"/>
-                <a:cs typeface="Microsoft JhengHei" pitchFamily="34" charset="-120"/>
-              </a:rPr>
-              <a:t>從 MySQL 經驗轉移，補向量查詢</a:t>
-            </a:r>
-            <a:endParaRPr lang="en-US" sz="1000" dirty="0"/>
-          </a:p>
-        </p:txBody>
-      </p:sp>
-      <p:sp>
-        <p:nvSpPr>
-          <p:cNvPr id="15" name="Shape 13"/>
-          <p:cNvSpPr/>
-          <p:nvPr/>
-        </p:nvSpPr>
-        <p:spPr>
-          <a:xfrm>
-            <a:off x="457200" y="3895344"/>
-            <a:ext cx="109728" cy="109728"/>
-          </a:xfrm>
-          <a:prstGeom prst="rect">
-            <a:avLst/>
-          </a:prstGeom>
-          <a:solidFill>
-            <a:srgbClr val="E3A23B"/>
-          </a:solidFill>
-          <a:ln w="12700">
-            <a:solidFill>
-              <a:srgbClr val="E3A23B"/>
-            </a:solidFill>
-            <a:prstDash val="solid"/>
-          </a:ln>
-        </p:spPr>
-      </p:sp>
-      <p:sp>
-        <p:nvSpPr>
-          <p:cNvPr id="16" name="Text 14"/>
-          <p:cNvSpPr txBox="1"/>
-          <p:nvPr/>
-        </p:nvSpPr>
-        <p:spPr>
-          <a:xfrm>
-            <a:off x="713232" y="3822192"/>
-            <a:ext cx="3200400" cy="274320"/>
-          </a:xfrm>
-          <a:prstGeom prst="rect">
-            <a:avLst/>
-          </a:prstGeom>
-          <a:noFill/>
-          <a:ln/>
-        </p:spPr>
-        <p:txBody>
-          <a:bodyPr wrap="square" lIns="0" tIns="0" rIns="0" bIns="0" rtlCol="0" anchor="t"/>
-          <a:lstStyle/>
-          <a:p>
-            <a:pPr indent="0" marL="0">
-              <a:buNone/>
-            </a:pPr>
-            <a:r>
-              <a:rPr lang="en-US" sz="1200" b="1" dirty="0">
-                <a:solidFill>
-                  <a:srgbClr val="F1F6F6"/>
-                </a:solidFill>
-                <a:latin typeface="Microsoft JhengHei" pitchFamily="34" charset="0"/>
-                <a:ea typeface="Microsoft JhengHei" pitchFamily="34" charset="-122"/>
-                <a:cs typeface="Microsoft JhengHei" pitchFamily="34" charset="-120"/>
-              </a:rPr>
-              <a:t>Java 基礎</a:t>
-            </a:r>
-            <a:endParaRPr lang="en-US" sz="1200" dirty="0"/>
-          </a:p>
-        </p:txBody>
-      </p:sp>
-      <p:sp>
-        <p:nvSpPr>
-          <p:cNvPr id="17" name="Text 15"/>
-          <p:cNvSpPr txBox="1"/>
-          <p:nvPr/>
-        </p:nvSpPr>
-        <p:spPr>
-          <a:xfrm>
-            <a:off x="713232" y="4096512"/>
-            <a:ext cx="3291840" cy="411480"/>
-          </a:xfrm>
-          <a:prstGeom prst="rect">
-            <a:avLst/>
-          </a:prstGeom>
-          <a:noFill/>
-          <a:ln/>
-        </p:spPr>
-        <p:txBody>
-          <a:bodyPr wrap="square" lIns="0" tIns="0" rIns="0" bIns="0" rtlCol="0" anchor="t"/>
-          <a:lstStyle/>
-          <a:p>
-            <a:pPr indent="0" marL="0">
-              <a:buNone/>
-            </a:pPr>
-            <a:r>
-              <a:rPr lang="en-US" sz="1000" dirty="0">
-                <a:solidFill>
-                  <a:srgbClr val="9FB0B2"/>
-                </a:solidFill>
-                <a:latin typeface="Microsoft JhengHei" pitchFamily="34" charset="0"/>
-                <a:ea typeface="Microsoft JhengHei" pitchFamily="34" charset="-122"/>
-                <a:cs typeface="Microsoft JhengHei" pitchFamily="34" charset="-120"/>
-              </a:rPr>
-              <a:t>物件導向與 Spring Boot 基本概念</a:t>
-            </a:r>
-            <a:endParaRPr lang="en-US" sz="1000" dirty="0"/>
-          </a:p>
-        </p:txBody>
-      </p:sp>
-      <p:sp>
-        <p:nvSpPr>
-          <p:cNvPr id="18" name="Shape 16"/>
-          <p:cNvSpPr/>
-          <p:nvPr/>
-        </p:nvSpPr>
-        <p:spPr>
-          <a:xfrm>
-            <a:off x="4800600" y="1417320"/>
-            <a:ext cx="0" cy="2743200"/>
-          </a:xfrm>
-          <a:prstGeom prst="line">
-            <a:avLst/>
-          </a:prstGeom>
-          <a:noFill/>
-          <a:ln w="15875">
             <a:solidFill>
               <a:srgbClr val="2A3B42"/>
             </a:solidFill>
@@ -5034,14 +4253,287 @@
       </p:sp>
       <p:sp>
         <p:nvSpPr>
-          <p:cNvPr id="19" name="Shape 17"/>
+          <p:cNvPr id="7" name="Text 5"/>
+          <p:cNvSpPr txBox="1"/>
+          <p:nvPr/>
+        </p:nvSpPr>
+        <p:spPr>
+          <a:xfrm>
+            <a:off x="2148840" y="1280160"/>
+            <a:ext cx="1417320" cy="731520"/>
+          </a:xfrm>
+          <a:prstGeom prst="rect">
+            <a:avLst/>
+          </a:prstGeom>
+          <a:noFill/>
+          <a:ln/>
+        </p:spPr>
+        <p:txBody>
+          <a:bodyPr wrap="square" lIns="0" tIns="0" rIns="0" bIns="0" rtlCol="0" anchor="ctr"/>
+          <a:lstStyle/>
+          <a:p>
+            <a:pPr algn="ctr" indent="0" marL="0">
+              <a:buNone/>
+            </a:pPr>
+            <a:r>
+              <a:rPr lang="en-US" sz="1000" dirty="0">
+                <a:solidFill>
+                  <a:srgbClr val="F1F6F6"/>
+                </a:solidFill>
+                <a:latin typeface="Microsoft JhengHei" pitchFamily="34" charset="0"/>
+                <a:ea typeface="Microsoft JhengHei" pitchFamily="34" charset="-122"/>
+                <a:cs typeface="Microsoft JhengHei" pitchFamily="34" charset="-120"/>
+              </a:rPr>
+              <a:t>憑證影像</a:t>
+            </a:r>
+            <a:endParaRPr lang="en-US" sz="1000" dirty="0"/>
+          </a:p>
+        </p:txBody>
+      </p:sp>
+      <p:sp>
+        <p:nvSpPr>
+          <p:cNvPr id="8" name="Shape 6"/>
           <p:cNvSpPr/>
           <p:nvPr/>
         </p:nvSpPr>
         <p:spPr>
           <a:xfrm>
-            <a:off x="4617720" y="1234440"/>
-            <a:ext cx="365760" cy="365760"/>
+            <a:off x="3566160" y="1645920"/>
+            <a:ext cx="256032" cy="0"/>
+          </a:xfrm>
+          <a:prstGeom prst="line">
+            <a:avLst/>
+          </a:prstGeom>
+          <a:noFill/>
+          <a:ln w="15875">
+            <a:solidFill>
+              <a:srgbClr val="0ABAB5"/>
+            </a:solidFill>
+            <a:prstDash val="solid"/>
+            <a:tailEnd type="triangle"/>
+          </a:ln>
+        </p:spPr>
+      </p:sp>
+      <p:sp>
+        <p:nvSpPr>
+          <p:cNvPr id="9" name="Shape 7"/>
+          <p:cNvSpPr/>
+          <p:nvPr/>
+        </p:nvSpPr>
+        <p:spPr>
+          <a:xfrm>
+            <a:off x="3822192" y="1280160"/>
+            <a:ext cx="1417320" cy="731520"/>
+          </a:xfrm>
+          <a:prstGeom prst="rect">
+            <a:avLst/>
+          </a:prstGeom>
+          <a:solidFill>
+            <a:srgbClr val="121A1D"/>
+          </a:solidFill>
+          <a:ln w="12700">
+            <a:solidFill>
+              <a:srgbClr val="2A3B42"/>
+            </a:solidFill>
+            <a:prstDash val="solid"/>
+          </a:ln>
+        </p:spPr>
+      </p:sp>
+      <p:sp>
+        <p:nvSpPr>
+          <p:cNvPr id="10" name="Text 8"/>
+          <p:cNvSpPr txBox="1"/>
+          <p:nvPr/>
+        </p:nvSpPr>
+        <p:spPr>
+          <a:xfrm>
+            <a:off x="3822192" y="1280160"/>
+            <a:ext cx="1417320" cy="731520"/>
+          </a:xfrm>
+          <a:prstGeom prst="rect">
+            <a:avLst/>
+          </a:prstGeom>
+          <a:noFill/>
+          <a:ln/>
+        </p:spPr>
+        <p:txBody>
+          <a:bodyPr wrap="square" lIns="0" tIns="0" rIns="0" bIns="0" rtlCol="0" anchor="ctr"/>
+          <a:lstStyle/>
+          <a:p>
+            <a:pPr algn="ctr" indent="0" marL="0">
+              <a:buNone/>
+            </a:pPr>
+            <a:r>
+              <a:rPr lang="en-US" sz="1000" dirty="0">
+                <a:solidFill>
+                  <a:srgbClr val="F1F6F6"/>
+                </a:solidFill>
+                <a:latin typeface="Microsoft JhengHei" pitchFamily="34" charset="0"/>
+                <a:ea typeface="Microsoft JhengHei" pitchFamily="34" charset="-122"/>
+                <a:cs typeface="Microsoft JhengHei" pitchFamily="34" charset="-120"/>
+              </a:rPr>
+              <a:t>多模態抽欄位</a:t>
+            </a:r>
+            <a:endParaRPr lang="en-US" sz="1000" dirty="0"/>
+          </a:p>
+          <a:p>
+            <a:pPr algn="ctr" indent="0" marL="0">
+              <a:buNone/>
+            </a:pPr>
+            <a:r>
+              <a:rPr lang="en-US" sz="1000" dirty="0">
+                <a:solidFill>
+                  <a:srgbClr val="F1F6F6"/>
+                </a:solidFill>
+                <a:latin typeface="Microsoft JhengHei" pitchFamily="34" charset="0"/>
+                <a:ea typeface="Microsoft JhengHei" pitchFamily="34" charset="-122"/>
+                <a:cs typeface="Microsoft JhengHei" pitchFamily="34" charset="-120"/>
+              </a:rPr>
+              <a:t>JSON Schema</a:t>
+            </a:r>
+            <a:endParaRPr lang="en-US" sz="1000" dirty="0"/>
+          </a:p>
+        </p:txBody>
+      </p:sp>
+      <p:sp>
+        <p:nvSpPr>
+          <p:cNvPr id="11" name="Shape 9"/>
+          <p:cNvSpPr/>
+          <p:nvPr/>
+        </p:nvSpPr>
+        <p:spPr>
+          <a:xfrm>
+            <a:off x="5239512" y="1645920"/>
+            <a:ext cx="256032" cy="0"/>
+          </a:xfrm>
+          <a:prstGeom prst="line">
+            <a:avLst/>
+          </a:prstGeom>
+          <a:noFill/>
+          <a:ln w="15875">
+            <a:solidFill>
+              <a:srgbClr val="0ABAB5"/>
+            </a:solidFill>
+            <a:prstDash val="solid"/>
+            <a:tailEnd type="triangle"/>
+          </a:ln>
+        </p:spPr>
+      </p:sp>
+      <p:sp>
+        <p:nvSpPr>
+          <p:cNvPr id="12" name="Shape 10"/>
+          <p:cNvSpPr/>
+          <p:nvPr/>
+        </p:nvSpPr>
+        <p:spPr>
+          <a:xfrm>
+            <a:off x="5495544" y="1280160"/>
+            <a:ext cx="1417320" cy="731520"/>
+          </a:xfrm>
+          <a:prstGeom prst="rect">
+            <a:avLst/>
+          </a:prstGeom>
+          <a:solidFill>
+            <a:srgbClr val="121A1D"/>
+          </a:solidFill>
+          <a:ln w="12700">
+            <a:solidFill>
+              <a:srgbClr val="2A3B42"/>
+            </a:solidFill>
+            <a:prstDash val="solid"/>
+          </a:ln>
+        </p:spPr>
+      </p:sp>
+      <p:sp>
+        <p:nvSpPr>
+          <p:cNvPr id="13" name="Text 11"/>
+          <p:cNvSpPr txBox="1"/>
+          <p:nvPr/>
+        </p:nvSpPr>
+        <p:spPr>
+          <a:xfrm>
+            <a:off x="5495544" y="1280160"/>
+            <a:ext cx="1417320" cy="731520"/>
+          </a:xfrm>
+          <a:prstGeom prst="rect">
+            <a:avLst/>
+          </a:prstGeom>
+          <a:noFill/>
+          <a:ln/>
+        </p:spPr>
+        <p:txBody>
+          <a:bodyPr wrap="square" lIns="0" tIns="0" rIns="0" bIns="0" rtlCol="0" anchor="ctr"/>
+          <a:lstStyle/>
+          <a:p>
+            <a:pPr algn="ctr" indent="0" marL="0">
+              <a:buNone/>
+            </a:pPr>
+            <a:r>
+              <a:rPr lang="en-US" sz="1000" dirty="0">
+                <a:solidFill>
+                  <a:srgbClr val="F1F6F6"/>
+                </a:solidFill>
+                <a:latin typeface="Microsoft JhengHei" pitchFamily="34" charset="0"/>
+                <a:ea typeface="Microsoft JhengHei" pitchFamily="34" charset="-122"/>
+                <a:cs typeface="Microsoft JhengHei" pitchFamily="34" charset="-120"/>
+              </a:rPr>
+              <a:t>規則檢核</a:t>
+            </a:r>
+            <a:endParaRPr lang="en-US" sz="1000" dirty="0"/>
+          </a:p>
+          <a:p>
+            <a:pPr algn="ctr" indent="0" marL="0">
+              <a:buNone/>
+            </a:pPr>
+            <a:r>
+              <a:rPr lang="en-US" sz="1000" dirty="0">
+                <a:solidFill>
+                  <a:srgbClr val="F1F6F6"/>
+                </a:solidFill>
+                <a:latin typeface="Microsoft JhengHei" pitchFamily="34" charset="0"/>
+                <a:ea typeface="Microsoft JhengHei" pitchFamily="34" charset="-122"/>
+                <a:cs typeface="Microsoft JhengHei" pitchFamily="34" charset="-120"/>
+              </a:rPr>
+              <a:t>稅額、統編檢查碼</a:t>
+            </a:r>
+            <a:endParaRPr lang="en-US" sz="1000" dirty="0"/>
+          </a:p>
+        </p:txBody>
+      </p:sp>
+      <p:sp>
+        <p:nvSpPr>
+          <p:cNvPr id="14" name="Shape 12"/>
+          <p:cNvSpPr/>
+          <p:nvPr/>
+        </p:nvSpPr>
+        <p:spPr>
+          <a:xfrm>
+            <a:off x="6912864" y="1645920"/>
+            <a:ext cx="256032" cy="0"/>
+          </a:xfrm>
+          <a:prstGeom prst="line">
+            <a:avLst/>
+          </a:prstGeom>
+          <a:noFill/>
+          <a:ln w="15875">
+            <a:solidFill>
+              <a:srgbClr val="0ABAB5"/>
+            </a:solidFill>
+            <a:prstDash val="solid"/>
+            <a:tailEnd type="triangle"/>
+          </a:ln>
+        </p:spPr>
+      </p:sp>
+      <p:sp>
+        <p:nvSpPr>
+          <p:cNvPr id="15" name="Shape 13"/>
+          <p:cNvSpPr/>
+          <p:nvPr/>
+        </p:nvSpPr>
+        <p:spPr>
+          <a:xfrm>
+            <a:off x="7168896" y="1280160"/>
+            <a:ext cx="1417320" cy="731520"/>
           </a:xfrm>
           <a:prstGeom prst="rect">
             <a:avLst/>
@@ -5059,14 +4551,14 @@
       </p:sp>
       <p:sp>
         <p:nvSpPr>
-          <p:cNvPr id="20" name="Text 18"/>
-          <p:cNvSpPr txBox="1"/>
-          <p:nvPr/>
-        </p:nvSpPr>
-        <p:spPr>
-          <a:xfrm>
-            <a:off x="4617720" y="1234440"/>
-            <a:ext cx="365760" cy="365760"/>
+          <p:cNvPr id="16" name="Text 14"/>
+          <p:cNvSpPr txBox="1"/>
+          <p:nvPr/>
+        </p:nvSpPr>
+        <p:spPr>
+          <a:xfrm>
+            <a:off x="7168896" y="1280160"/>
+            <a:ext cx="1417320" cy="731520"/>
           </a:xfrm>
           <a:prstGeom prst="rect">
             <a:avLst/>
@@ -5082,85 +4574,24 @@
               <a:buNone/>
             </a:pPr>
             <a:r>
-              <a:rPr lang="en-US" sz="1300" b="1" dirty="0">
-                <a:solidFill>
-                  <a:srgbClr val="0ABAB5"/>
-                </a:solidFill>
-                <a:latin typeface="Consolas" pitchFamily="34" charset="0"/>
-                <a:ea typeface="Consolas" pitchFamily="34" charset="-122"/>
-                <a:cs typeface="Consolas" pitchFamily="34" charset="-120"/>
-              </a:rPr>
-              <a:t>1</a:t>
-            </a:r>
-            <a:endParaRPr lang="en-US" sz="1300" dirty="0"/>
-          </a:p>
-        </p:txBody>
-      </p:sp>
-      <p:sp>
-        <p:nvSpPr>
-          <p:cNvPr id="21" name="Text 19"/>
-          <p:cNvSpPr txBox="1"/>
-          <p:nvPr/>
-        </p:nvSpPr>
-        <p:spPr>
-          <a:xfrm>
-            <a:off x="5166360" y="1252728"/>
-            <a:ext cx="3474720" cy="320040"/>
-          </a:xfrm>
-          <a:prstGeom prst="rect">
-            <a:avLst/>
-          </a:prstGeom>
-          <a:noFill/>
-          <a:ln/>
-        </p:spPr>
-        <p:txBody>
-          <a:bodyPr wrap="square" lIns="0" tIns="0" rIns="0" bIns="0" rtlCol="0" anchor="t"/>
-          <a:lstStyle/>
-          <a:p>
-            <a:pPr indent="0" marL="0">
-              <a:buNone/>
-            </a:pPr>
-            <a:r>
-              <a:rPr lang="en-US" sz="1300" b="1" dirty="0">
-                <a:solidFill>
-                  <a:srgbClr val="0ABAB5"/>
+              <a:rPr lang="en-US" sz="1000" dirty="0">
+                <a:solidFill>
+                  <a:srgbClr val="F1F6F6"/>
                 </a:solidFill>
                 <a:latin typeface="Microsoft JhengHei" pitchFamily="34" charset="0"/>
                 <a:ea typeface="Microsoft JhengHei" pitchFamily="34" charset="-122"/>
                 <a:cs typeface="Microsoft JhengHei" pitchFamily="34" charset="-120"/>
               </a:rPr>
-              <a:t>第 1 個月</a:t>
-            </a:r>
-            <a:endParaRPr lang="en-US" sz="1300" dirty="0"/>
-          </a:p>
-        </p:txBody>
-      </p:sp>
-      <p:sp>
-        <p:nvSpPr>
-          <p:cNvPr id="22" name="Text 20"/>
-          <p:cNvSpPr txBox="1"/>
-          <p:nvPr/>
-        </p:nvSpPr>
-        <p:spPr>
-          <a:xfrm>
-            <a:off x="5166360" y="1581912"/>
-            <a:ext cx="3520440" cy="640080"/>
-          </a:xfrm>
-          <a:prstGeom prst="rect">
-            <a:avLst/>
-          </a:prstGeom>
-          <a:noFill/>
-          <a:ln/>
-        </p:spPr>
-        <p:txBody>
-          <a:bodyPr wrap="square" lIns="0" tIns="0" rIns="0" bIns="0" rtlCol="0" anchor="t"/>
-          <a:lstStyle/>
-          <a:p>
-            <a:pPr indent="0" marL="0">
-              <a:buNone/>
-            </a:pPr>
-            <a:r>
-              <a:rPr lang="en-US" sz="1100" dirty="0">
+              <a:t>低信心</a:t>
+            </a:r>
+            <a:endParaRPr lang="en-US" sz="1000" dirty="0"/>
+          </a:p>
+          <a:p>
+            <a:pPr algn="ctr" indent="0" marL="0">
+              <a:buNone/>
+            </a:pPr>
+            <a:r>
+              <a:rPr lang="en-US" sz="1000" dirty="0">
                 <a:solidFill>
                   <a:srgbClr val="F1F6F6"/>
                 </a:solidFill>
@@ -5168,9 +4599,234 @@
                 <a:ea typeface="Microsoft JhengHei" pitchFamily="34" charset="-122"/>
                 <a:cs typeface="Microsoft JhengHei" pitchFamily="34" charset="-120"/>
               </a:rPr>
-              <a:t>熟悉系統架構與既有 RAG Pipeline；整理常見問題，建立測試資料集</a:t>
-            </a:r>
-            <a:endParaRPr lang="en-US" sz="1100" dirty="0"/>
+              <a:t>轉人工確認</a:t>
+            </a:r>
+            <a:endParaRPr lang="en-US" sz="1000" dirty="0"/>
+          </a:p>
+        </p:txBody>
+      </p:sp>
+      <p:sp>
+        <p:nvSpPr>
+          <p:cNvPr id="17" name="Text 15"/>
+          <p:cNvSpPr txBox="1"/>
+          <p:nvPr/>
+        </p:nvSpPr>
+        <p:spPr>
+          <a:xfrm>
+            <a:off x="457200" y="2313432"/>
+            <a:ext cx="1645920" cy="822960"/>
+          </a:xfrm>
+          <a:prstGeom prst="rect">
+            <a:avLst/>
+          </a:prstGeom>
+          <a:noFill/>
+          <a:ln/>
+        </p:spPr>
+        <p:txBody>
+          <a:bodyPr wrap="square" lIns="0" tIns="0" rIns="0" bIns="0" rtlCol="0" anchor="ctr"/>
+          <a:lstStyle/>
+          <a:p>
+            <a:pPr indent="0" marL="0">
+              <a:buNone/>
+            </a:pPr>
+            <a:r>
+              <a:rPr lang="en-US" sz="1250" b="1" dirty="0">
+                <a:solidFill>
+                  <a:srgbClr val="0ABAB5"/>
+                </a:solidFill>
+                <a:latin typeface="Microsoft JhengHei" pitchFamily="34" charset="0"/>
+                <a:ea typeface="Microsoft JhengHei" pitchFamily="34" charset="-122"/>
+                <a:cs typeface="Microsoft JhengHei" pitchFamily="34" charset="-120"/>
+              </a:rPr>
+              <a:t>法規與操作客服 RAG</a:t>
+            </a:r>
+            <a:endParaRPr lang="en-US" sz="1250" dirty="0"/>
+          </a:p>
+        </p:txBody>
+      </p:sp>
+      <p:sp>
+        <p:nvSpPr>
+          <p:cNvPr id="18" name="Shape 16"/>
+          <p:cNvSpPr/>
+          <p:nvPr/>
+        </p:nvSpPr>
+        <p:spPr>
+          <a:xfrm>
+            <a:off x="2148840" y="2359152"/>
+            <a:ext cx="1417320" cy="731520"/>
+          </a:xfrm>
+          <a:prstGeom prst="rect">
+            <a:avLst/>
+          </a:prstGeom>
+          <a:solidFill>
+            <a:srgbClr val="121A1D"/>
+          </a:solidFill>
+          <a:ln w="12700">
+            <a:solidFill>
+              <a:srgbClr val="2A3B42"/>
+            </a:solidFill>
+            <a:prstDash val="solid"/>
+          </a:ln>
+        </p:spPr>
+      </p:sp>
+      <p:sp>
+        <p:nvSpPr>
+          <p:cNvPr id="19" name="Text 17"/>
+          <p:cNvSpPr txBox="1"/>
+          <p:nvPr/>
+        </p:nvSpPr>
+        <p:spPr>
+          <a:xfrm>
+            <a:off x="2148840" y="2359152"/>
+            <a:ext cx="1417320" cy="731520"/>
+          </a:xfrm>
+          <a:prstGeom prst="rect">
+            <a:avLst/>
+          </a:prstGeom>
+          <a:noFill/>
+          <a:ln/>
+        </p:spPr>
+        <p:txBody>
+          <a:bodyPr wrap="square" lIns="0" tIns="0" rIns="0" bIns="0" rtlCol="0" anchor="ctr"/>
+          <a:lstStyle/>
+          <a:p>
+            <a:pPr algn="ctr" indent="0" marL="0">
+              <a:buNone/>
+            </a:pPr>
+            <a:r>
+              <a:rPr lang="en-US" sz="1000" dirty="0">
+                <a:solidFill>
+                  <a:srgbClr val="F1F6F6"/>
+                </a:solidFill>
+                <a:latin typeface="Microsoft JhengHei" pitchFamily="34" charset="0"/>
+                <a:ea typeface="Microsoft JhengHei" pitchFamily="34" charset="-122"/>
+                <a:cs typeface="Microsoft JhengHei" pitchFamily="34" charset="-120"/>
+              </a:rPr>
+              <a:t>法規公告</a:t>
+            </a:r>
+            <a:endParaRPr lang="en-US" sz="1000" dirty="0"/>
+          </a:p>
+          <a:p>
+            <a:pPr algn="ctr" indent="0" marL="0">
+              <a:buNone/>
+            </a:pPr>
+            <a:r>
+              <a:rPr lang="en-US" sz="1000" dirty="0">
+                <a:solidFill>
+                  <a:srgbClr val="F1F6F6"/>
+                </a:solidFill>
+                <a:latin typeface="Microsoft JhengHei" pitchFamily="34" charset="0"/>
+                <a:ea typeface="Microsoft JhengHei" pitchFamily="34" charset="-122"/>
+                <a:cs typeface="Microsoft JhengHei" pitchFamily="34" charset="-120"/>
+              </a:rPr>
+              <a:t>FAQ、手冊</a:t>
+            </a:r>
+            <a:endParaRPr lang="en-US" sz="1000" dirty="0"/>
+          </a:p>
+        </p:txBody>
+      </p:sp>
+      <p:sp>
+        <p:nvSpPr>
+          <p:cNvPr id="20" name="Shape 18"/>
+          <p:cNvSpPr/>
+          <p:nvPr/>
+        </p:nvSpPr>
+        <p:spPr>
+          <a:xfrm>
+            <a:off x="3566160" y="2724912"/>
+            <a:ext cx="256032" cy="0"/>
+          </a:xfrm>
+          <a:prstGeom prst="line">
+            <a:avLst/>
+          </a:prstGeom>
+          <a:noFill/>
+          <a:ln w="15875">
+            <a:solidFill>
+              <a:srgbClr val="0ABAB5"/>
+            </a:solidFill>
+            <a:prstDash val="solid"/>
+            <a:tailEnd type="triangle"/>
+          </a:ln>
+        </p:spPr>
+      </p:sp>
+      <p:sp>
+        <p:nvSpPr>
+          <p:cNvPr id="21" name="Shape 19"/>
+          <p:cNvSpPr/>
+          <p:nvPr/>
+        </p:nvSpPr>
+        <p:spPr>
+          <a:xfrm>
+            <a:off x="3822192" y="2359152"/>
+            <a:ext cx="1417320" cy="731520"/>
+          </a:xfrm>
+          <a:prstGeom prst="rect">
+            <a:avLst/>
+          </a:prstGeom>
+          <a:solidFill>
+            <a:srgbClr val="121A1D"/>
+          </a:solidFill>
+          <a:ln w="12700">
+            <a:solidFill>
+              <a:srgbClr val="2A3B42"/>
+            </a:solidFill>
+            <a:prstDash val="solid"/>
+          </a:ln>
+        </p:spPr>
+      </p:sp>
+      <p:sp>
+        <p:nvSpPr>
+          <p:cNvPr id="22" name="Text 20"/>
+          <p:cNvSpPr txBox="1"/>
+          <p:nvPr/>
+        </p:nvSpPr>
+        <p:spPr>
+          <a:xfrm>
+            <a:off x="3822192" y="2359152"/>
+            <a:ext cx="1417320" cy="731520"/>
+          </a:xfrm>
+          <a:prstGeom prst="rect">
+            <a:avLst/>
+          </a:prstGeom>
+          <a:noFill/>
+          <a:ln/>
+        </p:spPr>
+        <p:txBody>
+          <a:bodyPr wrap="square" lIns="0" tIns="0" rIns="0" bIns="0" rtlCol="0" anchor="ctr"/>
+          <a:lstStyle/>
+          <a:p>
+            <a:pPr algn="ctr" indent="0" marL="0">
+              <a:buNone/>
+            </a:pPr>
+            <a:r>
+              <a:rPr lang="en-US" sz="1000" dirty="0">
+                <a:solidFill>
+                  <a:srgbClr val="F1F6F6"/>
+                </a:solidFill>
+                <a:latin typeface="Microsoft JhengHei" pitchFamily="34" charset="0"/>
+                <a:ea typeface="Microsoft JhengHei" pitchFamily="34" charset="-122"/>
+                <a:cs typeface="Microsoft JhengHei" pitchFamily="34" charset="-120"/>
+              </a:rPr>
+              <a:t>混合檢索</a:t>
+            </a:r>
+            <a:endParaRPr lang="en-US" sz="1000" dirty="0"/>
+          </a:p>
+          <a:p>
+            <a:pPr algn="ctr" indent="0" marL="0">
+              <a:buNone/>
+            </a:pPr>
+            <a:r>
+              <a:rPr lang="en-US" sz="1000" dirty="0">
+                <a:solidFill>
+                  <a:srgbClr val="F1F6F6"/>
+                </a:solidFill>
+                <a:latin typeface="Microsoft JhengHei" pitchFamily="34" charset="0"/>
+                <a:ea typeface="Microsoft JhengHei" pitchFamily="34" charset="-122"/>
+                <a:cs typeface="Microsoft JhengHei" pitchFamily="34" charset="-120"/>
+              </a:rPr>
+              <a:t>＋ Rerank</a:t>
+            </a:r>
+            <a:endParaRPr lang="en-US" sz="1000" dirty="0"/>
           </a:p>
         </p:txBody>
       </p:sp>
@@ -5182,8 +4838,137 @@
         </p:nvSpPr>
         <p:spPr>
           <a:xfrm>
-            <a:off x="4617720" y="2258568"/>
-            <a:ext cx="365760" cy="365760"/>
+            <a:off x="5239512" y="2724912"/>
+            <a:ext cx="256032" cy="0"/>
+          </a:xfrm>
+          <a:prstGeom prst="line">
+            <a:avLst/>
+          </a:prstGeom>
+          <a:noFill/>
+          <a:ln w="15875">
+            <a:solidFill>
+              <a:srgbClr val="0ABAB5"/>
+            </a:solidFill>
+            <a:prstDash val="solid"/>
+            <a:tailEnd type="triangle"/>
+          </a:ln>
+        </p:spPr>
+      </p:sp>
+      <p:sp>
+        <p:nvSpPr>
+          <p:cNvPr id="24" name="Shape 22"/>
+          <p:cNvSpPr/>
+          <p:nvPr/>
+        </p:nvSpPr>
+        <p:spPr>
+          <a:xfrm>
+            <a:off x="5495544" y="2359152"/>
+            <a:ext cx="1417320" cy="731520"/>
+          </a:xfrm>
+          <a:prstGeom prst="rect">
+            <a:avLst/>
+          </a:prstGeom>
+          <a:solidFill>
+            <a:srgbClr val="121A1D"/>
+          </a:solidFill>
+          <a:ln w="12700">
+            <a:solidFill>
+              <a:srgbClr val="2A3B42"/>
+            </a:solidFill>
+            <a:prstDash val="solid"/>
+          </a:ln>
+        </p:spPr>
+      </p:sp>
+      <p:sp>
+        <p:nvSpPr>
+          <p:cNvPr id="25" name="Text 23"/>
+          <p:cNvSpPr txBox="1"/>
+          <p:nvPr/>
+        </p:nvSpPr>
+        <p:spPr>
+          <a:xfrm>
+            <a:off x="5495544" y="2359152"/>
+            <a:ext cx="1417320" cy="731520"/>
+          </a:xfrm>
+          <a:prstGeom prst="rect">
+            <a:avLst/>
+          </a:prstGeom>
+          <a:noFill/>
+          <a:ln/>
+        </p:spPr>
+        <p:txBody>
+          <a:bodyPr wrap="square" lIns="0" tIns="0" rIns="0" bIns="0" rtlCol="0" anchor="ctr"/>
+          <a:lstStyle/>
+          <a:p>
+            <a:pPr algn="ctr" indent="0" marL="0">
+              <a:buNone/>
+            </a:pPr>
+            <a:r>
+              <a:rPr lang="en-US" sz="1000" dirty="0">
+                <a:solidFill>
+                  <a:srgbClr val="F1F6F6"/>
+                </a:solidFill>
+                <a:latin typeface="Microsoft JhengHei" pitchFamily="34" charset="0"/>
+                <a:ea typeface="Microsoft JhengHei" pitchFamily="34" charset="-122"/>
+                <a:cs typeface="Microsoft JhengHei" pitchFamily="34" charset="-120"/>
+              </a:rPr>
+              <a:t>附來源回答</a:t>
+            </a:r>
+            <a:endParaRPr lang="en-US" sz="1000" dirty="0"/>
+          </a:p>
+          <a:p>
+            <a:pPr algn="ctr" indent="0" marL="0">
+              <a:buNone/>
+            </a:pPr>
+            <a:r>
+              <a:rPr lang="en-US" sz="1000" dirty="0">
+                <a:solidFill>
+                  <a:srgbClr val="F1F6F6"/>
+                </a:solidFill>
+                <a:latin typeface="Microsoft JhengHei" pitchFamily="34" charset="0"/>
+                <a:ea typeface="Microsoft JhengHei" pitchFamily="34" charset="-122"/>
+                <a:cs typeface="Microsoft JhengHei" pitchFamily="34" charset="-120"/>
+              </a:rPr>
+              <a:t>找不到就說</a:t>
+            </a:r>
+            <a:endParaRPr lang="en-US" sz="1000" dirty="0"/>
+          </a:p>
+        </p:txBody>
+      </p:sp>
+      <p:sp>
+        <p:nvSpPr>
+          <p:cNvPr id="26" name="Shape 24"/>
+          <p:cNvSpPr/>
+          <p:nvPr/>
+        </p:nvSpPr>
+        <p:spPr>
+          <a:xfrm>
+            <a:off x="6912864" y="2724912"/>
+            <a:ext cx="256032" cy="0"/>
+          </a:xfrm>
+          <a:prstGeom prst="line">
+            <a:avLst/>
+          </a:prstGeom>
+          <a:noFill/>
+          <a:ln w="15875">
+            <a:solidFill>
+              <a:srgbClr val="0ABAB5"/>
+            </a:solidFill>
+            <a:prstDash val="solid"/>
+            <a:tailEnd type="triangle"/>
+          </a:ln>
+        </p:spPr>
+      </p:sp>
+      <p:sp>
+        <p:nvSpPr>
+          <p:cNvPr id="27" name="Shape 25"/>
+          <p:cNvSpPr/>
+          <p:nvPr/>
+        </p:nvSpPr>
+        <p:spPr>
+          <a:xfrm>
+            <a:off x="7168896" y="2359152"/>
+            <a:ext cx="1417320" cy="731520"/>
           </a:xfrm>
           <a:prstGeom prst="rect">
             <a:avLst/>
@@ -5201,14 +4986,14 @@
       </p:sp>
       <p:sp>
         <p:nvSpPr>
-          <p:cNvPr id="24" name="Text 22"/>
-          <p:cNvSpPr txBox="1"/>
-          <p:nvPr/>
-        </p:nvSpPr>
-        <p:spPr>
-          <a:xfrm>
-            <a:off x="4617720" y="2258568"/>
-            <a:ext cx="365760" cy="365760"/>
+          <p:cNvPr id="28" name="Text 26"/>
+          <p:cNvSpPr txBox="1"/>
+          <p:nvPr/>
+        </p:nvSpPr>
+        <p:spPr>
+          <a:xfrm>
+            <a:off x="7168896" y="2359152"/>
+            <a:ext cx="1417320" cy="731520"/>
           </a:xfrm>
           <a:prstGeom prst="rect">
             <a:avLst/>
@@ -5224,85 +5009,24 @@
               <a:buNone/>
             </a:pPr>
             <a:r>
-              <a:rPr lang="en-US" sz="1300" b="1" dirty="0">
-                <a:solidFill>
-                  <a:srgbClr val="0ABAB5"/>
-                </a:solidFill>
-                <a:latin typeface="Consolas" pitchFamily="34" charset="0"/>
-                <a:ea typeface="Consolas" pitchFamily="34" charset="-122"/>
-                <a:cs typeface="Consolas" pitchFamily="34" charset="-120"/>
-              </a:rPr>
-              <a:t>2</a:t>
-            </a:r>
-            <a:endParaRPr lang="en-US" sz="1300" dirty="0"/>
-          </a:p>
-        </p:txBody>
-      </p:sp>
-      <p:sp>
-        <p:nvSpPr>
-          <p:cNvPr id="25" name="Text 23"/>
-          <p:cNvSpPr txBox="1"/>
-          <p:nvPr/>
-        </p:nvSpPr>
-        <p:spPr>
-          <a:xfrm>
-            <a:off x="5166360" y="2276856"/>
-            <a:ext cx="3474720" cy="320040"/>
-          </a:xfrm>
-          <a:prstGeom prst="rect">
-            <a:avLst/>
-          </a:prstGeom>
-          <a:noFill/>
-          <a:ln/>
-        </p:spPr>
-        <p:txBody>
-          <a:bodyPr wrap="square" lIns="0" tIns="0" rIns="0" bIns="0" rtlCol="0" anchor="t"/>
-          <a:lstStyle/>
-          <a:p>
-            <a:pPr indent="0" marL="0">
-              <a:buNone/>
-            </a:pPr>
-            <a:r>
-              <a:rPr lang="en-US" sz="1300" b="1" dirty="0">
-                <a:solidFill>
-                  <a:srgbClr val="0ABAB5"/>
+              <a:rPr lang="en-US" sz="1000" dirty="0">
+                <a:solidFill>
+                  <a:srgbClr val="F1F6F6"/>
                 </a:solidFill>
                 <a:latin typeface="Microsoft JhengHei" pitchFamily="34" charset="0"/>
                 <a:ea typeface="Microsoft JhengHei" pitchFamily="34" charset="-122"/>
                 <a:cs typeface="Microsoft JhengHei" pitchFamily="34" charset="-120"/>
               </a:rPr>
-              <a:t>第 2 個月</a:t>
-            </a:r>
-            <a:endParaRPr lang="en-US" sz="1300" dirty="0"/>
-          </a:p>
-        </p:txBody>
-      </p:sp>
-      <p:sp>
-        <p:nvSpPr>
-          <p:cNvPr id="26" name="Text 24"/>
-          <p:cNvSpPr txBox="1"/>
-          <p:nvPr/>
-        </p:nvSpPr>
-        <p:spPr>
-          <a:xfrm>
-            <a:off x="5166360" y="2606040"/>
-            <a:ext cx="3520440" cy="640080"/>
-          </a:xfrm>
-          <a:prstGeom prst="rect">
-            <a:avLst/>
-          </a:prstGeom>
-          <a:noFill/>
-          <a:ln/>
-        </p:spPr>
-        <p:txBody>
-          <a:bodyPr wrap="square" lIns="0" tIns="0" rIns="0" bIns="0" rtlCol="0" anchor="t"/>
-          <a:lstStyle/>
-          <a:p>
-            <a:pPr indent="0" marL="0">
-              <a:buNone/>
-            </a:pPr>
-            <a:r>
-              <a:rPr lang="en-US" sz="1100" dirty="0">
+              <a:t>固定測試集</a:t>
+            </a:r>
+            <a:endParaRPr lang="en-US" sz="1000" dirty="0"/>
+          </a:p>
+          <a:p>
+            <a:pPr algn="ctr" indent="0" marL="0">
+              <a:buNone/>
+            </a:pPr>
+            <a:r>
+              <a:rPr lang="en-US" sz="1000" dirty="0">
                 <a:solidFill>
                   <a:srgbClr val="F1F6F6"/>
                 </a:solidFill>
@@ -5310,22 +5034,376 @@
                 <a:ea typeface="Microsoft JhengHei" pitchFamily="34" charset="-122"/>
                 <a:cs typeface="Microsoft JhengHei" pitchFamily="34" charset="-120"/>
               </a:rPr>
-              <a:t>負責 Tool Calling / MCP 元件的測試與開發，補齊異常處理</a:t>
-            </a:r>
-            <a:endParaRPr lang="en-US" sz="1100" dirty="0"/>
-          </a:p>
-        </p:txBody>
-      </p:sp>
-      <p:sp>
-        <p:nvSpPr>
-          <p:cNvPr id="27" name="Shape 25"/>
+              <a:t>持續評估</a:t>
+            </a:r>
+            <a:endParaRPr lang="en-US" sz="1000" dirty="0"/>
+          </a:p>
+        </p:txBody>
+      </p:sp>
+      <p:sp>
+        <p:nvSpPr>
+          <p:cNvPr id="29" name="Text 27"/>
+          <p:cNvSpPr txBox="1"/>
+          <p:nvPr/>
+        </p:nvSpPr>
+        <p:spPr>
+          <a:xfrm>
+            <a:off x="457200" y="3392424"/>
+            <a:ext cx="1645920" cy="822960"/>
+          </a:xfrm>
+          <a:prstGeom prst="rect">
+            <a:avLst/>
+          </a:prstGeom>
+          <a:noFill/>
+          <a:ln/>
+        </p:spPr>
+        <p:txBody>
+          <a:bodyPr wrap="square" lIns="0" tIns="0" rIns="0" bIns="0" rtlCol="0" anchor="ctr"/>
+          <a:lstStyle/>
+          <a:p>
+            <a:pPr indent="0" marL="0">
+              <a:buNone/>
+            </a:pPr>
+            <a:r>
+              <a:rPr lang="en-US" sz="1250" b="1" dirty="0">
+                <a:solidFill>
+                  <a:srgbClr val="0ABAB5"/>
+                </a:solidFill>
+                <a:latin typeface="Microsoft JhengHei" pitchFamily="34" charset="0"/>
+                <a:ea typeface="Microsoft JhengHei" pitchFamily="34" charset="-122"/>
+                <a:cs typeface="Microsoft JhengHei" pitchFamily="34" charset="-120"/>
+              </a:rPr>
+              <a:t>內部系統工具化</a:t>
+            </a:r>
+            <a:endParaRPr lang="en-US" sz="1250" dirty="0"/>
+          </a:p>
+        </p:txBody>
+      </p:sp>
+      <p:sp>
+        <p:nvSpPr>
+          <p:cNvPr id="30" name="Shape 28"/>
           <p:cNvSpPr/>
           <p:nvPr/>
         </p:nvSpPr>
         <p:spPr>
           <a:xfrm>
-            <a:off x="4617720" y="3282696"/>
-            <a:ext cx="365760" cy="365760"/>
+            <a:off x="2148840" y="3438144"/>
+            <a:ext cx="1417320" cy="731520"/>
+          </a:xfrm>
+          <a:prstGeom prst="rect">
+            <a:avLst/>
+          </a:prstGeom>
+          <a:solidFill>
+            <a:srgbClr val="121A1D"/>
+          </a:solidFill>
+          <a:ln w="12700">
+            <a:solidFill>
+              <a:srgbClr val="2A3B42"/>
+            </a:solidFill>
+            <a:prstDash val="solid"/>
+          </a:ln>
+        </p:spPr>
+      </p:sp>
+      <p:sp>
+        <p:nvSpPr>
+          <p:cNvPr id="31" name="Text 29"/>
+          <p:cNvSpPr txBox="1"/>
+          <p:nvPr/>
+        </p:nvSpPr>
+        <p:spPr>
+          <a:xfrm>
+            <a:off x="2148840" y="3438144"/>
+            <a:ext cx="1417320" cy="731520"/>
+          </a:xfrm>
+          <a:prstGeom prst="rect">
+            <a:avLst/>
+          </a:prstGeom>
+          <a:noFill/>
+          <a:ln/>
+        </p:spPr>
+        <p:txBody>
+          <a:bodyPr wrap="square" lIns="0" tIns="0" rIns="0" bIns="0" rtlCol="0" anchor="ctr"/>
+          <a:lstStyle/>
+          <a:p>
+            <a:pPr algn="ctr" indent="0" marL="0">
+              <a:buNone/>
+            </a:pPr>
+            <a:r>
+              <a:rPr lang="en-US" sz="1000" dirty="0">
+                <a:solidFill>
+                  <a:srgbClr val="F1F6F6"/>
+                </a:solidFill>
+                <a:latin typeface="Microsoft JhengHei" pitchFamily="34" charset="0"/>
+                <a:ea typeface="Microsoft JhengHei" pitchFamily="34" charset="-122"/>
+                <a:cs typeface="Microsoft JhengHei" pitchFamily="34" charset="-120"/>
+              </a:rPr>
+              <a:t>發票查詢</a:t>
+            </a:r>
+            <a:endParaRPr lang="en-US" sz="1000" dirty="0"/>
+          </a:p>
+          <a:p>
+            <a:pPr algn="ctr" indent="0" marL="0">
+              <a:buNone/>
+            </a:pPr>
+            <a:r>
+              <a:rPr lang="en-US" sz="1000" dirty="0">
+                <a:solidFill>
+                  <a:srgbClr val="F1F6F6"/>
+                </a:solidFill>
+                <a:latin typeface="Microsoft JhengHei" pitchFamily="34" charset="0"/>
+                <a:ea typeface="Microsoft JhengHei" pitchFamily="34" charset="-122"/>
+                <a:cs typeface="Microsoft JhengHei" pitchFamily="34" charset="-120"/>
+              </a:rPr>
+              <a:t>字軌檢核</a:t>
+            </a:r>
+            <a:endParaRPr lang="en-US" sz="1000" dirty="0"/>
+          </a:p>
+        </p:txBody>
+      </p:sp>
+      <p:sp>
+        <p:nvSpPr>
+          <p:cNvPr id="32" name="Shape 30"/>
+          <p:cNvSpPr/>
+          <p:nvPr/>
+        </p:nvSpPr>
+        <p:spPr>
+          <a:xfrm>
+            <a:off x="3566160" y="3803904"/>
+            <a:ext cx="256032" cy="0"/>
+          </a:xfrm>
+          <a:prstGeom prst="line">
+            <a:avLst/>
+          </a:prstGeom>
+          <a:noFill/>
+          <a:ln w="15875">
+            <a:solidFill>
+              <a:srgbClr val="0ABAB5"/>
+            </a:solidFill>
+            <a:prstDash val="solid"/>
+            <a:tailEnd type="triangle"/>
+          </a:ln>
+        </p:spPr>
+      </p:sp>
+      <p:sp>
+        <p:nvSpPr>
+          <p:cNvPr id="33" name="Shape 31"/>
+          <p:cNvSpPr/>
+          <p:nvPr/>
+        </p:nvSpPr>
+        <p:spPr>
+          <a:xfrm>
+            <a:off x="3822192" y="3438144"/>
+            <a:ext cx="1417320" cy="731520"/>
+          </a:xfrm>
+          <a:prstGeom prst="rect">
+            <a:avLst/>
+          </a:prstGeom>
+          <a:solidFill>
+            <a:srgbClr val="121A1D"/>
+          </a:solidFill>
+          <a:ln w="12700">
+            <a:solidFill>
+              <a:srgbClr val="2A3B42"/>
+            </a:solidFill>
+            <a:prstDash val="solid"/>
+          </a:ln>
+        </p:spPr>
+      </p:sp>
+      <p:sp>
+        <p:nvSpPr>
+          <p:cNvPr id="34" name="Text 32"/>
+          <p:cNvSpPr txBox="1"/>
+          <p:nvPr/>
+        </p:nvSpPr>
+        <p:spPr>
+          <a:xfrm>
+            <a:off x="3822192" y="3438144"/>
+            <a:ext cx="1417320" cy="731520"/>
+          </a:xfrm>
+          <a:prstGeom prst="rect">
+            <a:avLst/>
+          </a:prstGeom>
+          <a:noFill/>
+          <a:ln/>
+        </p:spPr>
+        <p:txBody>
+          <a:bodyPr wrap="square" lIns="0" tIns="0" rIns="0" bIns="0" rtlCol="0" anchor="ctr"/>
+          <a:lstStyle/>
+          <a:p>
+            <a:pPr algn="ctr" indent="0" marL="0">
+              <a:buNone/>
+            </a:pPr>
+            <a:r>
+              <a:rPr lang="en-US" sz="1000" dirty="0">
+                <a:solidFill>
+                  <a:srgbClr val="F1F6F6"/>
+                </a:solidFill>
+                <a:latin typeface="Microsoft JhengHei" pitchFamily="34" charset="0"/>
+                <a:ea typeface="Microsoft JhengHei" pitchFamily="34" charset="-122"/>
+                <a:cs typeface="Microsoft JhengHei" pitchFamily="34" charset="-120"/>
+              </a:rPr>
+              <a:t>包成</a:t>
+            </a:r>
+            <a:endParaRPr lang="en-US" sz="1000" dirty="0"/>
+          </a:p>
+          <a:p>
+            <a:pPr algn="ctr" indent="0" marL="0">
+              <a:buNone/>
+            </a:pPr>
+            <a:r>
+              <a:rPr lang="en-US" sz="1000" dirty="0">
+                <a:solidFill>
+                  <a:srgbClr val="F1F6F6"/>
+                </a:solidFill>
+                <a:latin typeface="Microsoft JhengHei" pitchFamily="34" charset="0"/>
+                <a:ea typeface="Microsoft JhengHei" pitchFamily="34" charset="-122"/>
+                <a:cs typeface="Microsoft JhengHei" pitchFamily="34" charset="-120"/>
+              </a:rPr>
+              <a:t>MCP Server</a:t>
+            </a:r>
+            <a:endParaRPr lang="en-US" sz="1000" dirty="0"/>
+          </a:p>
+        </p:txBody>
+      </p:sp>
+      <p:sp>
+        <p:nvSpPr>
+          <p:cNvPr id="35" name="Shape 33"/>
+          <p:cNvSpPr/>
+          <p:nvPr/>
+        </p:nvSpPr>
+        <p:spPr>
+          <a:xfrm>
+            <a:off x="5239512" y="3803904"/>
+            <a:ext cx="256032" cy="0"/>
+          </a:xfrm>
+          <a:prstGeom prst="line">
+            <a:avLst/>
+          </a:prstGeom>
+          <a:noFill/>
+          <a:ln w="15875">
+            <a:solidFill>
+              <a:srgbClr val="0ABAB5"/>
+            </a:solidFill>
+            <a:prstDash val="solid"/>
+            <a:tailEnd type="triangle"/>
+          </a:ln>
+        </p:spPr>
+      </p:sp>
+      <p:sp>
+        <p:nvSpPr>
+          <p:cNvPr id="36" name="Shape 34"/>
+          <p:cNvSpPr/>
+          <p:nvPr/>
+        </p:nvSpPr>
+        <p:spPr>
+          <a:xfrm>
+            <a:off x="5495544" y="3438144"/>
+            <a:ext cx="1417320" cy="731520"/>
+          </a:xfrm>
+          <a:prstGeom prst="rect">
+            <a:avLst/>
+          </a:prstGeom>
+          <a:solidFill>
+            <a:srgbClr val="121A1D"/>
+          </a:solidFill>
+          <a:ln w="12700">
+            <a:solidFill>
+              <a:srgbClr val="2A3B42"/>
+            </a:solidFill>
+            <a:prstDash val="solid"/>
+          </a:ln>
+        </p:spPr>
+      </p:sp>
+      <p:sp>
+        <p:nvSpPr>
+          <p:cNvPr id="37" name="Text 35"/>
+          <p:cNvSpPr txBox="1"/>
+          <p:nvPr/>
+        </p:nvSpPr>
+        <p:spPr>
+          <a:xfrm>
+            <a:off x="5495544" y="3438144"/>
+            <a:ext cx="1417320" cy="731520"/>
+          </a:xfrm>
+          <a:prstGeom prst="rect">
+            <a:avLst/>
+          </a:prstGeom>
+          <a:noFill/>
+          <a:ln/>
+        </p:spPr>
+        <p:txBody>
+          <a:bodyPr wrap="square" lIns="0" tIns="0" rIns="0" bIns="0" rtlCol="0" anchor="ctr"/>
+          <a:lstStyle/>
+          <a:p>
+            <a:pPr algn="ctr" indent="0" marL="0">
+              <a:buNone/>
+            </a:pPr>
+            <a:r>
+              <a:rPr lang="en-US" sz="1000" dirty="0">
+                <a:solidFill>
+                  <a:srgbClr val="F1F6F6"/>
+                </a:solidFill>
+                <a:latin typeface="Microsoft JhengHei" pitchFamily="34" charset="0"/>
+                <a:ea typeface="Microsoft JhengHei" pitchFamily="34" charset="-122"/>
+                <a:cs typeface="Microsoft JhengHei" pitchFamily="34" charset="-120"/>
+              </a:rPr>
+              <a:t>Agent 依需求</a:t>
+            </a:r>
+            <a:endParaRPr lang="en-US" sz="1000" dirty="0"/>
+          </a:p>
+          <a:p>
+            <a:pPr algn="ctr" indent="0" marL="0">
+              <a:buNone/>
+            </a:pPr>
+            <a:r>
+              <a:rPr lang="en-US" sz="1000" dirty="0">
+                <a:solidFill>
+                  <a:srgbClr val="F1F6F6"/>
+                </a:solidFill>
+                <a:latin typeface="Microsoft JhengHei" pitchFamily="34" charset="0"/>
+                <a:ea typeface="Microsoft JhengHei" pitchFamily="34" charset="-122"/>
+                <a:cs typeface="Microsoft JhengHei" pitchFamily="34" charset="-120"/>
+              </a:rPr>
+              <a:t>呼叫工具</a:t>
+            </a:r>
+            <a:endParaRPr lang="en-US" sz="1000" dirty="0"/>
+          </a:p>
+        </p:txBody>
+      </p:sp>
+      <p:sp>
+        <p:nvSpPr>
+          <p:cNvPr id="38" name="Shape 36"/>
+          <p:cNvSpPr/>
+          <p:nvPr/>
+        </p:nvSpPr>
+        <p:spPr>
+          <a:xfrm>
+            <a:off x="6912864" y="3803904"/>
+            <a:ext cx="256032" cy="0"/>
+          </a:xfrm>
+          <a:prstGeom prst="line">
+            <a:avLst/>
+          </a:prstGeom>
+          <a:noFill/>
+          <a:ln w="15875">
+            <a:solidFill>
+              <a:srgbClr val="0ABAB5"/>
+            </a:solidFill>
+            <a:prstDash val="solid"/>
+            <a:tailEnd type="triangle"/>
+          </a:ln>
+        </p:spPr>
+      </p:sp>
+      <p:sp>
+        <p:nvSpPr>
+          <p:cNvPr id="39" name="Shape 37"/>
+          <p:cNvSpPr/>
+          <p:nvPr/>
+        </p:nvSpPr>
+        <p:spPr>
+          <a:xfrm>
+            <a:off x="7168896" y="3438144"/>
+            <a:ext cx="1417320" cy="731520"/>
           </a:xfrm>
           <a:prstGeom prst="rect">
             <a:avLst/>
@@ -5343,14 +5421,14 @@
       </p:sp>
       <p:sp>
         <p:nvSpPr>
-          <p:cNvPr id="28" name="Text 26"/>
-          <p:cNvSpPr txBox="1"/>
-          <p:nvPr/>
-        </p:nvSpPr>
-        <p:spPr>
-          <a:xfrm>
-            <a:off x="4617720" y="3282696"/>
-            <a:ext cx="365760" cy="365760"/>
+          <p:cNvPr id="40" name="Text 38"/>
+          <p:cNvSpPr txBox="1"/>
+          <p:nvPr/>
+        </p:nvSpPr>
+        <p:spPr>
+          <a:xfrm>
+            <a:off x="7168896" y="3438144"/>
+            <a:ext cx="1417320" cy="731520"/>
           </a:xfrm>
           <a:prstGeom prst="rect">
             <a:avLst/>
@@ -5366,85 +5444,24 @@
               <a:buNone/>
             </a:pPr>
             <a:r>
-              <a:rPr lang="en-US" sz="1300" b="1" dirty="0">
-                <a:solidFill>
-                  <a:srgbClr val="0ABAB5"/>
-                </a:solidFill>
-                <a:latin typeface="Consolas" pitchFamily="34" charset="0"/>
-                <a:ea typeface="Consolas" pitchFamily="34" charset="-122"/>
-                <a:cs typeface="Consolas" pitchFamily="34" charset="-120"/>
-              </a:rPr>
-              <a:t>3</a:t>
-            </a:r>
-            <a:endParaRPr lang="en-US" sz="1300" dirty="0"/>
-          </a:p>
-        </p:txBody>
-      </p:sp>
-      <p:sp>
-        <p:nvSpPr>
-          <p:cNvPr id="29" name="Text 27"/>
-          <p:cNvSpPr txBox="1"/>
-          <p:nvPr/>
-        </p:nvSpPr>
-        <p:spPr>
-          <a:xfrm>
-            <a:off x="5166360" y="3300984"/>
-            <a:ext cx="3474720" cy="320040"/>
-          </a:xfrm>
-          <a:prstGeom prst="rect">
-            <a:avLst/>
-          </a:prstGeom>
-          <a:noFill/>
-          <a:ln/>
-        </p:spPr>
-        <p:txBody>
-          <a:bodyPr wrap="square" lIns="0" tIns="0" rIns="0" bIns="0" rtlCol="0" anchor="t"/>
-          <a:lstStyle/>
-          <a:p>
-            <a:pPr indent="0" marL="0">
-              <a:buNone/>
-            </a:pPr>
-            <a:r>
-              <a:rPr lang="en-US" sz="1300" b="1" dirty="0">
-                <a:solidFill>
-                  <a:srgbClr val="0ABAB5"/>
+              <a:rPr lang="en-US" sz="1000" dirty="0">
+                <a:solidFill>
+                  <a:srgbClr val="F1F6F6"/>
                 </a:solidFill>
                 <a:latin typeface="Microsoft JhengHei" pitchFamily="34" charset="0"/>
                 <a:ea typeface="Microsoft JhengHei" pitchFamily="34" charset="-122"/>
                 <a:cs typeface="Microsoft JhengHei" pitchFamily="34" charset="-120"/>
               </a:rPr>
-              <a:t>第 3 個月</a:t>
-            </a:r>
-            <a:endParaRPr lang="en-US" sz="1300" dirty="0"/>
-          </a:p>
-        </p:txBody>
-      </p:sp>
-      <p:sp>
-        <p:nvSpPr>
-          <p:cNvPr id="30" name="Text 28"/>
-          <p:cNvSpPr txBox="1"/>
-          <p:nvPr/>
-        </p:nvSpPr>
-        <p:spPr>
-          <a:xfrm>
-            <a:off x="5166360" y="3630168"/>
-            <a:ext cx="3520440" cy="640080"/>
-          </a:xfrm>
-          <a:prstGeom prst="rect">
-            <a:avLst/>
-          </a:prstGeom>
-          <a:noFill/>
-          <a:ln/>
-        </p:spPr>
-        <p:txBody>
-          <a:bodyPr wrap="square" lIns="0" tIns="0" rIns="0" bIns="0" rtlCol="0" anchor="t"/>
-          <a:lstStyle/>
-          <a:p>
-            <a:pPr indent="0" marL="0">
-              <a:buNone/>
-            </a:pPr>
-            <a:r>
-              <a:rPr lang="en-US" sz="1100" dirty="0">
+              <a:t>寫入類動作</a:t>
+            </a:r>
+            <a:endParaRPr lang="en-US" sz="1000" dirty="0"/>
+          </a:p>
+          <a:p>
+            <a:pPr algn="ctr" indent="0" marL="0">
+              <a:buNone/>
+            </a:pPr>
+            <a:r>
+              <a:rPr lang="en-US" sz="1000" dirty="0">
                 <a:solidFill>
                   <a:srgbClr val="F1F6F6"/>
                 </a:solidFill>
@@ -5452,9 +5469,48 @@
                 <a:ea typeface="Microsoft JhengHei" pitchFamily="34" charset="-122"/>
                 <a:cs typeface="Microsoft JhengHei" pitchFamily="34" charset="-120"/>
               </a:rPr>
-              <a:t>用 HitRate、MRR 等指標量化檢索品質，提出並驗證優化方案</a:t>
-            </a:r>
-            <a:endParaRPr lang="en-US" sz="1100" dirty="0"/>
+              <a:t>人工確認</a:t>
+            </a:r>
+            <a:endParaRPr lang="en-US" sz="1000" dirty="0"/>
+          </a:p>
+        </p:txBody>
+      </p:sp>
+      <p:sp>
+        <p:nvSpPr>
+          <p:cNvPr id="41" name="Text 39"/>
+          <p:cNvSpPr txBox="1"/>
+          <p:nvPr/>
+        </p:nvSpPr>
+        <p:spPr>
+          <a:xfrm>
+            <a:off x="457200" y="4526280"/>
+            <a:ext cx="8229600" cy="274320"/>
+          </a:xfrm>
+          <a:prstGeom prst="rect">
+            <a:avLst/>
+          </a:prstGeom>
+          <a:noFill/>
+          <a:ln/>
+        </p:spPr>
+        <p:txBody>
+          <a:bodyPr wrap="square" lIns="0" tIns="0" rIns="0" bIns="0" rtlCol="0" anchor="t"/>
+          <a:lstStyle/>
+          <a:p>
+            <a:pPr indent="0" marL="0">
+              <a:buNone/>
+            </a:pPr>
+            <a:r>
+              <a:rPr lang="en-US" sz="1000" dirty="0">
+                <a:solidFill>
+                  <a:srgbClr val="6F8083"/>
+                </a:solidFill>
+                <a:latin typeface="Microsoft JhengHei" pitchFamily="34" charset="0"/>
+                <a:ea typeface="Microsoft JhengHei" pitchFamily="34" charset="-122"/>
+                <a:cs typeface="Microsoft JhengHei" pitchFamily="34" charset="-120"/>
+              </a:rPr>
+              <a:t>這是依官網與職缺公開資訊的推想，想聽團隊實際的優先順序與限制。</a:t>
+            </a:r>
+            <a:endParaRPr lang="en-US" sz="1000" dirty="0"/>
           </a:p>
         </p:txBody>
       </p:sp>
@@ -5523,7 +5579,7 @@
                 <a:ea typeface="Consolas" pitchFamily="34" charset="-122"/>
                 <a:cs typeface="Consolas" pitchFamily="34" charset="-120"/>
               </a:rPr>
-              <a:t>Q &amp; A</a:t>
+              <a:t>GROWTH PLAN</a:t>
             </a:r>
             <a:endParaRPr lang="en-US" sz="900" dirty="0"/>
           </a:p>
@@ -5562,7 +5618,1056 @@
                 <a:ea typeface="Consolas" pitchFamily="34" charset="-122"/>
                 <a:cs typeface="Consolas" pitchFamily="34" charset="-120"/>
               </a:rPr>
-              <a:t>12 / 12</a:t>
+              <a:t>12 / 13</a:t>
+            </a:r>
+            <a:endParaRPr lang="en-US" sz="900" dirty="0"/>
+          </a:p>
+        </p:txBody>
+      </p:sp>
+      <p:sp>
+        <p:nvSpPr>
+          <p:cNvPr id="4" name="Text 2"/>
+          <p:cNvSpPr txBox="1"/>
+          <p:nvPr/>
+        </p:nvSpPr>
+        <p:spPr>
+          <a:xfrm>
+            <a:off x="457200" y="502920"/>
+            <a:ext cx="8229600" cy="548640"/>
+          </a:xfrm>
+          <a:prstGeom prst="rect">
+            <a:avLst/>
+          </a:prstGeom>
+          <a:noFill/>
+          <a:ln/>
+        </p:spPr>
+        <p:txBody>
+          <a:bodyPr wrap="square" lIns="0" tIns="0" rIns="0" bIns="0" rtlCol="0" anchor="ctr"/>
+          <a:lstStyle/>
+          <a:p>
+            <a:pPr indent="0" marL="0">
+              <a:buNone/>
+            </a:pPr>
+            <a:r>
+              <a:rPr lang="en-US" sz="2600" b="1" dirty="0">
+                <a:solidFill>
+                  <a:srgbClr val="F1F6F6"/>
+                </a:solidFill>
+                <a:latin typeface="Microsoft JhengHei" pitchFamily="34" charset="0"/>
+                <a:ea typeface="Microsoft JhengHei" pitchFamily="34" charset="-122"/>
+                <a:cs typeface="Microsoft JhengHei" pitchFamily="34" charset="-120"/>
+              </a:rPr>
+              <a:t>誠實的缺口，與前 90 天的計畫</a:t>
+            </a:r>
+            <a:endParaRPr lang="en-US" sz="2600" dirty="0"/>
+          </a:p>
+        </p:txBody>
+      </p:sp>
+      <p:sp>
+        <p:nvSpPr>
+          <p:cNvPr id="5" name="Text 3"/>
+          <p:cNvSpPr txBox="1"/>
+          <p:nvPr/>
+        </p:nvSpPr>
+        <p:spPr>
+          <a:xfrm>
+            <a:off x="457200" y="1188720"/>
+            <a:ext cx="3474720" cy="320040"/>
+          </a:xfrm>
+          <a:prstGeom prst="rect">
+            <a:avLst/>
+          </a:prstGeom>
+          <a:noFill/>
+          <a:ln/>
+        </p:spPr>
+        <p:txBody>
+          <a:bodyPr wrap="square" lIns="0" tIns="0" rIns="0" bIns="0" rtlCol="0" anchor="t"/>
+          <a:lstStyle/>
+          <a:p>
+            <a:pPr indent="0" marL="0">
+              <a:buNone/>
+            </a:pPr>
+            <a:r>
+              <a:rPr lang="en-US" sz="1400" b="1" dirty="0">
+                <a:solidFill>
+                  <a:srgbClr val="F1F6F6"/>
+                </a:solidFill>
+                <a:latin typeface="Microsoft JhengHei" pitchFamily="34" charset="0"/>
+                <a:ea typeface="Microsoft JhengHei" pitchFamily="34" charset="-122"/>
+                <a:cs typeface="Microsoft JhengHei" pitchFamily="34" charset="-120"/>
+              </a:rPr>
+              <a:t>目前正在補強</a:t>
+            </a:r>
+            <a:endParaRPr lang="en-US" sz="1400" dirty="0"/>
+          </a:p>
+        </p:txBody>
+      </p:sp>
+      <p:sp>
+        <p:nvSpPr>
+          <p:cNvPr id="6" name="Shape 4"/>
+          <p:cNvSpPr/>
+          <p:nvPr/>
+        </p:nvSpPr>
+        <p:spPr>
+          <a:xfrm>
+            <a:off x="457200" y="1700784"/>
+            <a:ext cx="109728" cy="109728"/>
+          </a:xfrm>
+          <a:prstGeom prst="rect">
+            <a:avLst/>
+          </a:prstGeom>
+          <a:solidFill>
+            <a:srgbClr val="E3A23B"/>
+          </a:solidFill>
+          <a:ln w="12700">
+            <a:solidFill>
+              <a:srgbClr val="E3A23B"/>
+            </a:solidFill>
+            <a:prstDash val="solid"/>
+          </a:ln>
+        </p:spPr>
+      </p:sp>
+      <p:sp>
+        <p:nvSpPr>
+          <p:cNvPr id="7" name="Text 5"/>
+          <p:cNvSpPr txBox="1"/>
+          <p:nvPr/>
+        </p:nvSpPr>
+        <p:spPr>
+          <a:xfrm>
+            <a:off x="713232" y="1627632"/>
+            <a:ext cx="3200400" cy="274320"/>
+          </a:xfrm>
+          <a:prstGeom prst="rect">
+            <a:avLst/>
+          </a:prstGeom>
+          <a:noFill/>
+          <a:ln/>
+        </p:spPr>
+        <p:txBody>
+          <a:bodyPr wrap="square" lIns="0" tIns="0" rIns="0" bIns="0" rtlCol="0" anchor="t"/>
+          <a:lstStyle/>
+          <a:p>
+            <a:pPr indent="0" marL="0">
+              <a:buNone/>
+            </a:pPr>
+            <a:r>
+              <a:rPr lang="en-US" sz="1200" b="1" dirty="0">
+                <a:solidFill>
+                  <a:srgbClr val="F1F6F6"/>
+                </a:solidFill>
+                <a:latin typeface="Microsoft JhengHei" pitchFamily="34" charset="0"/>
+                <a:ea typeface="Microsoft JhengHei" pitchFamily="34" charset="-122"/>
+                <a:cs typeface="Microsoft JhengHei" pitchFamily="34" charset="-120"/>
+              </a:rPr>
+              <a:t>RAG 上線實作</a:t>
+            </a:r>
+            <a:endParaRPr lang="en-US" sz="1200" dirty="0"/>
+          </a:p>
+        </p:txBody>
+      </p:sp>
+      <p:sp>
+        <p:nvSpPr>
+          <p:cNvPr id="8" name="Text 6"/>
+          <p:cNvSpPr txBox="1"/>
+          <p:nvPr/>
+        </p:nvSpPr>
+        <p:spPr>
+          <a:xfrm>
+            <a:off x="713232" y="1901952"/>
+            <a:ext cx="3291840" cy="411480"/>
+          </a:xfrm>
+          <a:prstGeom prst="rect">
+            <a:avLst/>
+          </a:prstGeom>
+          <a:noFill/>
+          <a:ln/>
+        </p:spPr>
+        <p:txBody>
+          <a:bodyPr wrap="square" lIns="0" tIns="0" rIns="0" bIns="0" rtlCol="0" anchor="t"/>
+          <a:lstStyle/>
+          <a:p>
+            <a:pPr indent="0" marL="0">
+              <a:buNone/>
+            </a:pPr>
+            <a:r>
+              <a:rPr lang="en-US" sz="1000" dirty="0">
+                <a:solidFill>
+                  <a:srgbClr val="9FB0B2"/>
+                </a:solidFill>
+                <a:latin typeface="Microsoft JhengHei" pitchFamily="34" charset="0"/>
+                <a:ea typeface="Microsoft JhengHei" pitchFamily="34" charset="-122"/>
+                <a:cs typeface="Microsoft JhengHei" pitchFamily="34" charset="-120"/>
+              </a:rPr>
+              <a:t>流程、chunk、混合檢索、rerank、評估指標已整理，接著做完整實作</a:t>
+            </a:r>
+            <a:endParaRPr lang="en-US" sz="1000" dirty="0"/>
+          </a:p>
+        </p:txBody>
+      </p:sp>
+      <p:sp>
+        <p:nvSpPr>
+          <p:cNvPr id="9" name="Shape 7"/>
+          <p:cNvSpPr/>
+          <p:nvPr/>
+        </p:nvSpPr>
+        <p:spPr>
+          <a:xfrm>
+            <a:off x="457200" y="2432304"/>
+            <a:ext cx="109728" cy="109728"/>
+          </a:xfrm>
+          <a:prstGeom prst="rect">
+            <a:avLst/>
+          </a:prstGeom>
+          <a:solidFill>
+            <a:srgbClr val="E3A23B"/>
+          </a:solidFill>
+          <a:ln w="12700">
+            <a:solidFill>
+              <a:srgbClr val="E3A23B"/>
+            </a:solidFill>
+            <a:prstDash val="solid"/>
+          </a:ln>
+        </p:spPr>
+      </p:sp>
+      <p:sp>
+        <p:nvSpPr>
+          <p:cNvPr id="10" name="Text 8"/>
+          <p:cNvSpPr txBox="1"/>
+          <p:nvPr/>
+        </p:nvSpPr>
+        <p:spPr>
+          <a:xfrm>
+            <a:off x="713232" y="2359152"/>
+            <a:ext cx="3200400" cy="274320"/>
+          </a:xfrm>
+          <a:prstGeom prst="rect">
+            <a:avLst/>
+          </a:prstGeom>
+          <a:noFill/>
+          <a:ln/>
+        </p:spPr>
+        <p:txBody>
+          <a:bodyPr wrap="square" lIns="0" tIns="0" rIns="0" bIns="0" rtlCol="0" anchor="t"/>
+          <a:lstStyle/>
+          <a:p>
+            <a:pPr indent="0" marL="0">
+              <a:buNone/>
+            </a:pPr>
+            <a:r>
+              <a:rPr lang="en-US" sz="1200" b="1" dirty="0">
+                <a:solidFill>
+                  <a:srgbClr val="F1F6F6"/>
+                </a:solidFill>
+                <a:latin typeface="Microsoft JhengHei" pitchFamily="34" charset="0"/>
+                <a:ea typeface="Microsoft JhengHei" pitchFamily="34" charset="-122"/>
+                <a:cs typeface="Microsoft JhengHei" pitchFamily="34" charset="-120"/>
+              </a:rPr>
+              <a:t>MCP ＋ LangGraph</a:t>
+            </a:r>
+            <a:endParaRPr lang="en-US" sz="1200" dirty="0"/>
+          </a:p>
+        </p:txBody>
+      </p:sp>
+      <p:sp>
+        <p:nvSpPr>
+          <p:cNvPr id="11" name="Text 9"/>
+          <p:cNvSpPr txBox="1"/>
+          <p:nvPr/>
+        </p:nvSpPr>
+        <p:spPr>
+          <a:xfrm>
+            <a:off x="713232" y="2633472"/>
+            <a:ext cx="3291840" cy="411480"/>
+          </a:xfrm>
+          <a:prstGeom prst="rect">
+            <a:avLst/>
+          </a:prstGeom>
+          <a:noFill/>
+          <a:ln/>
+        </p:spPr>
+        <p:txBody>
+          <a:bodyPr wrap="square" lIns="0" tIns="0" rIns="0" bIns="0" rtlCol="0" anchor="t"/>
+          <a:lstStyle/>
+          <a:p>
+            <a:pPr indent="0" marL="0">
+              <a:buNone/>
+            </a:pPr>
+            <a:r>
+              <a:rPr lang="en-US" sz="1000" dirty="0">
+                <a:solidFill>
+                  <a:srgbClr val="9FB0B2"/>
+                </a:solidFill>
+                <a:latin typeface="Microsoft JhengHei" pitchFamily="34" charset="0"/>
+                <a:ea typeface="Microsoft JhengHei" pitchFamily="34" charset="-122"/>
+                <a:cs typeface="Microsoft JhengHei" pitchFamily="34" charset="-120"/>
+              </a:rPr>
+              <a:t>理解 Host / Client / Server 與 State / Node / Edge，動手寫 MCP Server</a:t>
+            </a:r>
+            <a:endParaRPr lang="en-US" sz="1000" dirty="0"/>
+          </a:p>
+        </p:txBody>
+      </p:sp>
+      <p:sp>
+        <p:nvSpPr>
+          <p:cNvPr id="12" name="Shape 10"/>
+          <p:cNvSpPr/>
+          <p:nvPr/>
+        </p:nvSpPr>
+        <p:spPr>
+          <a:xfrm>
+            <a:off x="457200" y="3163824"/>
+            <a:ext cx="109728" cy="109728"/>
+          </a:xfrm>
+          <a:prstGeom prst="rect">
+            <a:avLst/>
+          </a:prstGeom>
+          <a:solidFill>
+            <a:srgbClr val="E3A23B"/>
+          </a:solidFill>
+          <a:ln w="12700">
+            <a:solidFill>
+              <a:srgbClr val="E3A23B"/>
+            </a:solidFill>
+            <a:prstDash val="solid"/>
+          </a:ln>
+        </p:spPr>
+      </p:sp>
+      <p:sp>
+        <p:nvSpPr>
+          <p:cNvPr id="13" name="Text 11"/>
+          <p:cNvSpPr txBox="1"/>
+          <p:nvPr/>
+        </p:nvSpPr>
+        <p:spPr>
+          <a:xfrm>
+            <a:off x="713232" y="3090672"/>
+            <a:ext cx="3200400" cy="274320"/>
+          </a:xfrm>
+          <a:prstGeom prst="rect">
+            <a:avLst/>
+          </a:prstGeom>
+          <a:noFill/>
+          <a:ln/>
+        </p:spPr>
+        <p:txBody>
+          <a:bodyPr wrap="square" lIns="0" tIns="0" rIns="0" bIns="0" rtlCol="0" anchor="t"/>
+          <a:lstStyle/>
+          <a:p>
+            <a:pPr indent="0" marL="0">
+              <a:buNone/>
+            </a:pPr>
+            <a:r>
+              <a:rPr lang="en-US" sz="1200" b="1" dirty="0">
+                <a:solidFill>
+                  <a:srgbClr val="F1F6F6"/>
+                </a:solidFill>
+                <a:latin typeface="Microsoft JhengHei" pitchFamily="34" charset="0"/>
+                <a:ea typeface="Microsoft JhengHei" pitchFamily="34" charset="-122"/>
+                <a:cs typeface="Microsoft JhengHei" pitchFamily="34" charset="-120"/>
+              </a:rPr>
+              <a:t>PostgreSQL ＋ pgvector</a:t>
+            </a:r>
+            <a:endParaRPr lang="en-US" sz="1200" dirty="0"/>
+          </a:p>
+        </p:txBody>
+      </p:sp>
+      <p:sp>
+        <p:nvSpPr>
+          <p:cNvPr id="14" name="Text 12"/>
+          <p:cNvSpPr txBox="1"/>
+          <p:nvPr/>
+        </p:nvSpPr>
+        <p:spPr>
+          <a:xfrm>
+            <a:off x="713232" y="3364992"/>
+            <a:ext cx="3291840" cy="411480"/>
+          </a:xfrm>
+          <a:prstGeom prst="rect">
+            <a:avLst/>
+          </a:prstGeom>
+          <a:noFill/>
+          <a:ln/>
+        </p:spPr>
+        <p:txBody>
+          <a:bodyPr wrap="square" lIns="0" tIns="0" rIns="0" bIns="0" rtlCol="0" anchor="t"/>
+          <a:lstStyle/>
+          <a:p>
+            <a:pPr indent="0" marL="0">
+              <a:buNone/>
+            </a:pPr>
+            <a:r>
+              <a:rPr lang="en-US" sz="1000" dirty="0">
+                <a:solidFill>
+                  <a:srgbClr val="9FB0B2"/>
+                </a:solidFill>
+                <a:latin typeface="Microsoft JhengHei" pitchFamily="34" charset="0"/>
+                <a:ea typeface="Microsoft JhengHei" pitchFamily="34" charset="-122"/>
+                <a:cs typeface="Microsoft JhengHei" pitchFamily="34" charset="-120"/>
+              </a:rPr>
+              <a:t>從 MySQL 經驗轉移，補向量查詢</a:t>
+            </a:r>
+            <a:endParaRPr lang="en-US" sz="1000" dirty="0"/>
+          </a:p>
+        </p:txBody>
+      </p:sp>
+      <p:sp>
+        <p:nvSpPr>
+          <p:cNvPr id="15" name="Shape 13"/>
+          <p:cNvSpPr/>
+          <p:nvPr/>
+        </p:nvSpPr>
+        <p:spPr>
+          <a:xfrm>
+            <a:off x="457200" y="3895344"/>
+            <a:ext cx="109728" cy="109728"/>
+          </a:xfrm>
+          <a:prstGeom prst="rect">
+            <a:avLst/>
+          </a:prstGeom>
+          <a:solidFill>
+            <a:srgbClr val="E3A23B"/>
+          </a:solidFill>
+          <a:ln w="12700">
+            <a:solidFill>
+              <a:srgbClr val="E3A23B"/>
+            </a:solidFill>
+            <a:prstDash val="solid"/>
+          </a:ln>
+        </p:spPr>
+      </p:sp>
+      <p:sp>
+        <p:nvSpPr>
+          <p:cNvPr id="16" name="Text 14"/>
+          <p:cNvSpPr txBox="1"/>
+          <p:nvPr/>
+        </p:nvSpPr>
+        <p:spPr>
+          <a:xfrm>
+            <a:off x="713232" y="3822192"/>
+            <a:ext cx="3200400" cy="274320"/>
+          </a:xfrm>
+          <a:prstGeom prst="rect">
+            <a:avLst/>
+          </a:prstGeom>
+          <a:noFill/>
+          <a:ln/>
+        </p:spPr>
+        <p:txBody>
+          <a:bodyPr wrap="square" lIns="0" tIns="0" rIns="0" bIns="0" rtlCol="0" anchor="t"/>
+          <a:lstStyle/>
+          <a:p>
+            <a:pPr indent="0" marL="0">
+              <a:buNone/>
+            </a:pPr>
+            <a:r>
+              <a:rPr lang="en-US" sz="1200" b="1" dirty="0">
+                <a:solidFill>
+                  <a:srgbClr val="F1F6F6"/>
+                </a:solidFill>
+                <a:latin typeface="Microsoft JhengHei" pitchFamily="34" charset="0"/>
+                <a:ea typeface="Microsoft JhengHei" pitchFamily="34" charset="-122"/>
+                <a:cs typeface="Microsoft JhengHei" pitchFamily="34" charset="-120"/>
+              </a:rPr>
+              <a:t>Java 基礎</a:t>
+            </a:r>
+            <a:endParaRPr lang="en-US" sz="1200" dirty="0"/>
+          </a:p>
+        </p:txBody>
+      </p:sp>
+      <p:sp>
+        <p:nvSpPr>
+          <p:cNvPr id="17" name="Text 15"/>
+          <p:cNvSpPr txBox="1"/>
+          <p:nvPr/>
+        </p:nvSpPr>
+        <p:spPr>
+          <a:xfrm>
+            <a:off x="713232" y="4096512"/>
+            <a:ext cx="3291840" cy="411480"/>
+          </a:xfrm>
+          <a:prstGeom prst="rect">
+            <a:avLst/>
+          </a:prstGeom>
+          <a:noFill/>
+          <a:ln/>
+        </p:spPr>
+        <p:txBody>
+          <a:bodyPr wrap="square" lIns="0" tIns="0" rIns="0" bIns="0" rtlCol="0" anchor="t"/>
+          <a:lstStyle/>
+          <a:p>
+            <a:pPr indent="0" marL="0">
+              <a:buNone/>
+            </a:pPr>
+            <a:r>
+              <a:rPr lang="en-US" sz="1000" dirty="0">
+                <a:solidFill>
+                  <a:srgbClr val="9FB0B2"/>
+                </a:solidFill>
+                <a:latin typeface="Microsoft JhengHei" pitchFamily="34" charset="0"/>
+                <a:ea typeface="Microsoft JhengHei" pitchFamily="34" charset="-122"/>
+                <a:cs typeface="Microsoft JhengHei" pitchFamily="34" charset="-120"/>
+              </a:rPr>
+              <a:t>物件導向與 Spring Boot 基本概念</a:t>
+            </a:r>
+            <a:endParaRPr lang="en-US" sz="1000" dirty="0"/>
+          </a:p>
+        </p:txBody>
+      </p:sp>
+      <p:sp>
+        <p:nvSpPr>
+          <p:cNvPr id="18" name="Shape 16"/>
+          <p:cNvSpPr/>
+          <p:nvPr/>
+        </p:nvSpPr>
+        <p:spPr>
+          <a:xfrm>
+            <a:off x="4800600" y="1417320"/>
+            <a:ext cx="0" cy="2743200"/>
+          </a:xfrm>
+          <a:prstGeom prst="line">
+            <a:avLst/>
+          </a:prstGeom>
+          <a:noFill/>
+          <a:ln w="15875">
+            <a:solidFill>
+              <a:srgbClr val="2A3B42"/>
+            </a:solidFill>
+            <a:prstDash val="solid"/>
+          </a:ln>
+        </p:spPr>
+      </p:sp>
+      <p:sp>
+        <p:nvSpPr>
+          <p:cNvPr id="19" name="Shape 17"/>
+          <p:cNvSpPr/>
+          <p:nvPr/>
+        </p:nvSpPr>
+        <p:spPr>
+          <a:xfrm>
+            <a:off x="4617720" y="1234440"/>
+            <a:ext cx="365760" cy="365760"/>
+          </a:xfrm>
+          <a:prstGeom prst="rect">
+            <a:avLst/>
+          </a:prstGeom>
+          <a:solidFill>
+            <a:srgbClr val="16232A"/>
+          </a:solidFill>
+          <a:ln w="12700">
+            <a:solidFill>
+              <a:srgbClr val="0ABAB5"/>
+            </a:solidFill>
+            <a:prstDash val="solid"/>
+          </a:ln>
+        </p:spPr>
+      </p:sp>
+      <p:sp>
+        <p:nvSpPr>
+          <p:cNvPr id="20" name="Text 18"/>
+          <p:cNvSpPr txBox="1"/>
+          <p:nvPr/>
+        </p:nvSpPr>
+        <p:spPr>
+          <a:xfrm>
+            <a:off x="4617720" y="1234440"/>
+            <a:ext cx="365760" cy="365760"/>
+          </a:xfrm>
+          <a:prstGeom prst="rect">
+            <a:avLst/>
+          </a:prstGeom>
+          <a:noFill/>
+          <a:ln/>
+        </p:spPr>
+        <p:txBody>
+          <a:bodyPr wrap="square" lIns="0" tIns="0" rIns="0" bIns="0" rtlCol="0" anchor="ctr"/>
+          <a:lstStyle/>
+          <a:p>
+            <a:pPr algn="ctr" indent="0" marL="0">
+              <a:buNone/>
+            </a:pPr>
+            <a:r>
+              <a:rPr lang="en-US" sz="1300" b="1" dirty="0">
+                <a:solidFill>
+                  <a:srgbClr val="0ABAB5"/>
+                </a:solidFill>
+                <a:latin typeface="Consolas" pitchFamily="34" charset="0"/>
+                <a:ea typeface="Consolas" pitchFamily="34" charset="-122"/>
+                <a:cs typeface="Consolas" pitchFamily="34" charset="-120"/>
+              </a:rPr>
+              <a:t>1</a:t>
+            </a:r>
+            <a:endParaRPr lang="en-US" sz="1300" dirty="0"/>
+          </a:p>
+        </p:txBody>
+      </p:sp>
+      <p:sp>
+        <p:nvSpPr>
+          <p:cNvPr id="21" name="Text 19"/>
+          <p:cNvSpPr txBox="1"/>
+          <p:nvPr/>
+        </p:nvSpPr>
+        <p:spPr>
+          <a:xfrm>
+            <a:off x="5166360" y="1252728"/>
+            <a:ext cx="3474720" cy="320040"/>
+          </a:xfrm>
+          <a:prstGeom prst="rect">
+            <a:avLst/>
+          </a:prstGeom>
+          <a:noFill/>
+          <a:ln/>
+        </p:spPr>
+        <p:txBody>
+          <a:bodyPr wrap="square" lIns="0" tIns="0" rIns="0" bIns="0" rtlCol="0" anchor="t"/>
+          <a:lstStyle/>
+          <a:p>
+            <a:pPr indent="0" marL="0">
+              <a:buNone/>
+            </a:pPr>
+            <a:r>
+              <a:rPr lang="en-US" sz="1300" b="1" dirty="0">
+                <a:solidFill>
+                  <a:srgbClr val="0ABAB5"/>
+                </a:solidFill>
+                <a:latin typeface="Microsoft JhengHei" pitchFamily="34" charset="0"/>
+                <a:ea typeface="Microsoft JhengHei" pitchFamily="34" charset="-122"/>
+                <a:cs typeface="Microsoft JhengHei" pitchFamily="34" charset="-120"/>
+              </a:rPr>
+              <a:t>第 1 個月</a:t>
+            </a:r>
+            <a:endParaRPr lang="en-US" sz="1300" dirty="0"/>
+          </a:p>
+        </p:txBody>
+      </p:sp>
+      <p:sp>
+        <p:nvSpPr>
+          <p:cNvPr id="22" name="Text 20"/>
+          <p:cNvSpPr txBox="1"/>
+          <p:nvPr/>
+        </p:nvSpPr>
+        <p:spPr>
+          <a:xfrm>
+            <a:off x="5166360" y="1581912"/>
+            <a:ext cx="3520440" cy="640080"/>
+          </a:xfrm>
+          <a:prstGeom prst="rect">
+            <a:avLst/>
+          </a:prstGeom>
+          <a:noFill/>
+          <a:ln/>
+        </p:spPr>
+        <p:txBody>
+          <a:bodyPr wrap="square" lIns="0" tIns="0" rIns="0" bIns="0" rtlCol="0" anchor="t"/>
+          <a:lstStyle/>
+          <a:p>
+            <a:pPr indent="0" marL="0">
+              <a:buNone/>
+            </a:pPr>
+            <a:r>
+              <a:rPr lang="en-US" sz="1100" dirty="0">
+                <a:solidFill>
+                  <a:srgbClr val="F1F6F6"/>
+                </a:solidFill>
+                <a:latin typeface="Microsoft JhengHei" pitchFamily="34" charset="0"/>
+                <a:ea typeface="Microsoft JhengHei" pitchFamily="34" charset="-122"/>
+                <a:cs typeface="Microsoft JhengHei" pitchFamily="34" charset="-120"/>
+              </a:rPr>
+              <a:t>熟悉系統架構與既有 RAG Pipeline；整理常見問題，建立測試資料集</a:t>
+            </a:r>
+            <a:endParaRPr lang="en-US" sz="1100" dirty="0"/>
+          </a:p>
+        </p:txBody>
+      </p:sp>
+      <p:sp>
+        <p:nvSpPr>
+          <p:cNvPr id="23" name="Shape 21"/>
+          <p:cNvSpPr/>
+          <p:nvPr/>
+        </p:nvSpPr>
+        <p:spPr>
+          <a:xfrm>
+            <a:off x="4617720" y="2258568"/>
+            <a:ext cx="365760" cy="365760"/>
+          </a:xfrm>
+          <a:prstGeom prst="rect">
+            <a:avLst/>
+          </a:prstGeom>
+          <a:solidFill>
+            <a:srgbClr val="16232A"/>
+          </a:solidFill>
+          <a:ln w="12700">
+            <a:solidFill>
+              <a:srgbClr val="0ABAB5"/>
+            </a:solidFill>
+            <a:prstDash val="solid"/>
+          </a:ln>
+        </p:spPr>
+      </p:sp>
+      <p:sp>
+        <p:nvSpPr>
+          <p:cNvPr id="24" name="Text 22"/>
+          <p:cNvSpPr txBox="1"/>
+          <p:nvPr/>
+        </p:nvSpPr>
+        <p:spPr>
+          <a:xfrm>
+            <a:off x="4617720" y="2258568"/>
+            <a:ext cx="365760" cy="365760"/>
+          </a:xfrm>
+          <a:prstGeom prst="rect">
+            <a:avLst/>
+          </a:prstGeom>
+          <a:noFill/>
+          <a:ln/>
+        </p:spPr>
+        <p:txBody>
+          <a:bodyPr wrap="square" lIns="0" tIns="0" rIns="0" bIns="0" rtlCol="0" anchor="ctr"/>
+          <a:lstStyle/>
+          <a:p>
+            <a:pPr algn="ctr" indent="0" marL="0">
+              <a:buNone/>
+            </a:pPr>
+            <a:r>
+              <a:rPr lang="en-US" sz="1300" b="1" dirty="0">
+                <a:solidFill>
+                  <a:srgbClr val="0ABAB5"/>
+                </a:solidFill>
+                <a:latin typeface="Consolas" pitchFamily="34" charset="0"/>
+                <a:ea typeface="Consolas" pitchFamily="34" charset="-122"/>
+                <a:cs typeface="Consolas" pitchFamily="34" charset="-120"/>
+              </a:rPr>
+              <a:t>2</a:t>
+            </a:r>
+            <a:endParaRPr lang="en-US" sz="1300" dirty="0"/>
+          </a:p>
+        </p:txBody>
+      </p:sp>
+      <p:sp>
+        <p:nvSpPr>
+          <p:cNvPr id="25" name="Text 23"/>
+          <p:cNvSpPr txBox="1"/>
+          <p:nvPr/>
+        </p:nvSpPr>
+        <p:spPr>
+          <a:xfrm>
+            <a:off x="5166360" y="2276856"/>
+            <a:ext cx="3474720" cy="320040"/>
+          </a:xfrm>
+          <a:prstGeom prst="rect">
+            <a:avLst/>
+          </a:prstGeom>
+          <a:noFill/>
+          <a:ln/>
+        </p:spPr>
+        <p:txBody>
+          <a:bodyPr wrap="square" lIns="0" tIns="0" rIns="0" bIns="0" rtlCol="0" anchor="t"/>
+          <a:lstStyle/>
+          <a:p>
+            <a:pPr indent="0" marL="0">
+              <a:buNone/>
+            </a:pPr>
+            <a:r>
+              <a:rPr lang="en-US" sz="1300" b="1" dirty="0">
+                <a:solidFill>
+                  <a:srgbClr val="0ABAB5"/>
+                </a:solidFill>
+                <a:latin typeface="Microsoft JhengHei" pitchFamily="34" charset="0"/>
+                <a:ea typeface="Microsoft JhengHei" pitchFamily="34" charset="-122"/>
+                <a:cs typeface="Microsoft JhengHei" pitchFamily="34" charset="-120"/>
+              </a:rPr>
+              <a:t>第 2 個月</a:t>
+            </a:r>
+            <a:endParaRPr lang="en-US" sz="1300" dirty="0"/>
+          </a:p>
+        </p:txBody>
+      </p:sp>
+      <p:sp>
+        <p:nvSpPr>
+          <p:cNvPr id="26" name="Text 24"/>
+          <p:cNvSpPr txBox="1"/>
+          <p:nvPr/>
+        </p:nvSpPr>
+        <p:spPr>
+          <a:xfrm>
+            <a:off x="5166360" y="2606040"/>
+            <a:ext cx="3520440" cy="640080"/>
+          </a:xfrm>
+          <a:prstGeom prst="rect">
+            <a:avLst/>
+          </a:prstGeom>
+          <a:noFill/>
+          <a:ln/>
+        </p:spPr>
+        <p:txBody>
+          <a:bodyPr wrap="square" lIns="0" tIns="0" rIns="0" bIns="0" rtlCol="0" anchor="t"/>
+          <a:lstStyle/>
+          <a:p>
+            <a:pPr indent="0" marL="0">
+              <a:buNone/>
+            </a:pPr>
+            <a:r>
+              <a:rPr lang="en-US" sz="1100" dirty="0">
+                <a:solidFill>
+                  <a:srgbClr val="F1F6F6"/>
+                </a:solidFill>
+                <a:latin typeface="Microsoft JhengHei" pitchFamily="34" charset="0"/>
+                <a:ea typeface="Microsoft JhengHei" pitchFamily="34" charset="-122"/>
+                <a:cs typeface="Microsoft JhengHei" pitchFamily="34" charset="-120"/>
+              </a:rPr>
+              <a:t>負責 Tool Calling / MCP 元件的測試與開發，補齊異常處理</a:t>
+            </a:r>
+            <a:endParaRPr lang="en-US" sz="1100" dirty="0"/>
+          </a:p>
+        </p:txBody>
+      </p:sp>
+      <p:sp>
+        <p:nvSpPr>
+          <p:cNvPr id="27" name="Shape 25"/>
+          <p:cNvSpPr/>
+          <p:nvPr/>
+        </p:nvSpPr>
+        <p:spPr>
+          <a:xfrm>
+            <a:off x="4617720" y="3282696"/>
+            <a:ext cx="365760" cy="365760"/>
+          </a:xfrm>
+          <a:prstGeom prst="rect">
+            <a:avLst/>
+          </a:prstGeom>
+          <a:solidFill>
+            <a:srgbClr val="16232A"/>
+          </a:solidFill>
+          <a:ln w="12700">
+            <a:solidFill>
+              <a:srgbClr val="0ABAB5"/>
+            </a:solidFill>
+            <a:prstDash val="solid"/>
+          </a:ln>
+        </p:spPr>
+      </p:sp>
+      <p:sp>
+        <p:nvSpPr>
+          <p:cNvPr id="28" name="Text 26"/>
+          <p:cNvSpPr txBox="1"/>
+          <p:nvPr/>
+        </p:nvSpPr>
+        <p:spPr>
+          <a:xfrm>
+            <a:off x="4617720" y="3282696"/>
+            <a:ext cx="365760" cy="365760"/>
+          </a:xfrm>
+          <a:prstGeom prst="rect">
+            <a:avLst/>
+          </a:prstGeom>
+          <a:noFill/>
+          <a:ln/>
+        </p:spPr>
+        <p:txBody>
+          <a:bodyPr wrap="square" lIns="0" tIns="0" rIns="0" bIns="0" rtlCol="0" anchor="ctr"/>
+          <a:lstStyle/>
+          <a:p>
+            <a:pPr algn="ctr" indent="0" marL="0">
+              <a:buNone/>
+            </a:pPr>
+            <a:r>
+              <a:rPr lang="en-US" sz="1300" b="1" dirty="0">
+                <a:solidFill>
+                  <a:srgbClr val="0ABAB5"/>
+                </a:solidFill>
+                <a:latin typeface="Consolas" pitchFamily="34" charset="0"/>
+                <a:ea typeface="Consolas" pitchFamily="34" charset="-122"/>
+                <a:cs typeface="Consolas" pitchFamily="34" charset="-120"/>
+              </a:rPr>
+              <a:t>3</a:t>
+            </a:r>
+            <a:endParaRPr lang="en-US" sz="1300" dirty="0"/>
+          </a:p>
+        </p:txBody>
+      </p:sp>
+      <p:sp>
+        <p:nvSpPr>
+          <p:cNvPr id="29" name="Text 27"/>
+          <p:cNvSpPr txBox="1"/>
+          <p:nvPr/>
+        </p:nvSpPr>
+        <p:spPr>
+          <a:xfrm>
+            <a:off x="5166360" y="3300984"/>
+            <a:ext cx="3474720" cy="320040"/>
+          </a:xfrm>
+          <a:prstGeom prst="rect">
+            <a:avLst/>
+          </a:prstGeom>
+          <a:noFill/>
+          <a:ln/>
+        </p:spPr>
+        <p:txBody>
+          <a:bodyPr wrap="square" lIns="0" tIns="0" rIns="0" bIns="0" rtlCol="0" anchor="t"/>
+          <a:lstStyle/>
+          <a:p>
+            <a:pPr indent="0" marL="0">
+              <a:buNone/>
+            </a:pPr>
+            <a:r>
+              <a:rPr lang="en-US" sz="1300" b="1" dirty="0">
+                <a:solidFill>
+                  <a:srgbClr val="0ABAB5"/>
+                </a:solidFill>
+                <a:latin typeface="Microsoft JhengHei" pitchFamily="34" charset="0"/>
+                <a:ea typeface="Microsoft JhengHei" pitchFamily="34" charset="-122"/>
+                <a:cs typeface="Microsoft JhengHei" pitchFamily="34" charset="-120"/>
+              </a:rPr>
+              <a:t>第 3 個月</a:t>
+            </a:r>
+            <a:endParaRPr lang="en-US" sz="1300" dirty="0"/>
+          </a:p>
+        </p:txBody>
+      </p:sp>
+      <p:sp>
+        <p:nvSpPr>
+          <p:cNvPr id="30" name="Text 28"/>
+          <p:cNvSpPr txBox="1"/>
+          <p:nvPr/>
+        </p:nvSpPr>
+        <p:spPr>
+          <a:xfrm>
+            <a:off x="5166360" y="3630168"/>
+            <a:ext cx="3520440" cy="640080"/>
+          </a:xfrm>
+          <a:prstGeom prst="rect">
+            <a:avLst/>
+          </a:prstGeom>
+          <a:noFill/>
+          <a:ln/>
+        </p:spPr>
+        <p:txBody>
+          <a:bodyPr wrap="square" lIns="0" tIns="0" rIns="0" bIns="0" rtlCol="0" anchor="t"/>
+          <a:lstStyle/>
+          <a:p>
+            <a:pPr indent="0" marL="0">
+              <a:buNone/>
+            </a:pPr>
+            <a:r>
+              <a:rPr lang="en-US" sz="1100" dirty="0">
+                <a:solidFill>
+                  <a:srgbClr val="F1F6F6"/>
+                </a:solidFill>
+                <a:latin typeface="Microsoft JhengHei" pitchFamily="34" charset="0"/>
+                <a:ea typeface="Microsoft JhengHei" pitchFamily="34" charset="-122"/>
+                <a:cs typeface="Microsoft JhengHei" pitchFamily="34" charset="-120"/>
+              </a:rPr>
+              <a:t>用 HitRate、MRR 等指標量化檢索品質，提出並驗證優化方案</a:t>
+            </a:r>
+            <a:endParaRPr lang="en-US" sz="1100" dirty="0"/>
+          </a:p>
+        </p:txBody>
+      </p:sp>
+    </p:spTree>
+  </p:cSld>
+  <p:clrMapOvr>
+    <a:masterClrMapping/>
+  </p:clrMapOvr>
+</p:sld>
+</file>
+
+<file path=ppt/slides/slide13.xml><?xml version="1.0" encoding="utf-8"?>
+<p:sld xmlns:a="http://schemas.openxmlformats.org/drawingml/2006/main" xmlns:r="http://schemas.openxmlformats.org/officeDocument/2006/relationships" xmlns:p="http://schemas.openxmlformats.org/presentationml/2006/main">
+  <p:cSld name="Slide 13">
+    <p:bg>
+      <p:bgPr>
+        <a:solidFill>
+          <a:srgbClr val="0B1012"/>
+        </a:solidFill>
+      </p:bgPr>
+    </p:bg>
+    <p:spTree>
+      <p:nvGrpSpPr>
+        <p:cNvPr id="1" name=""/>
+        <p:cNvGrpSpPr/>
+        <p:nvPr/>
+      </p:nvGrpSpPr>
+      <p:grpSpPr>
+        <a:xfrm>
+          <a:off x="0" y="0"/>
+          <a:ext cx="0" cy="0"/>
+          <a:chOff x="0" y="0"/>
+          <a:chExt cx="0" cy="0"/>
+        </a:xfrm>
+      </p:grpSpPr>
+      <p:sp>
+        <p:nvSpPr>
+          <p:cNvPr id="2" name="Text 0"/>
+          <p:cNvSpPr txBox="1"/>
+          <p:nvPr/>
+        </p:nvSpPr>
+        <p:spPr>
+          <a:xfrm>
+            <a:off x="457200" y="256032"/>
+            <a:ext cx="5486400" cy="228600"/>
+          </a:xfrm>
+          <a:prstGeom prst="rect">
+            <a:avLst/>
+          </a:prstGeom>
+          <a:noFill/>
+          <a:ln/>
+        </p:spPr>
+        <p:txBody>
+          <a:bodyPr wrap="square" lIns="0" tIns="0" rIns="0" bIns="0" rtlCol="0" anchor="ctr"/>
+          <a:lstStyle/>
+          <a:p>
+            <a:pPr indent="0" marL="0">
+              <a:buNone/>
+            </a:pPr>
+            <a:r>
+              <a:rPr lang="en-US" sz="900" spc="300" kern="0" dirty="0">
+                <a:solidFill>
+                  <a:srgbClr val="0ABAB5"/>
+                </a:solidFill>
+                <a:latin typeface="Consolas" pitchFamily="34" charset="0"/>
+                <a:ea typeface="Consolas" pitchFamily="34" charset="-122"/>
+                <a:cs typeface="Consolas" pitchFamily="34" charset="-120"/>
+              </a:rPr>
+              <a:t>Q &amp; A</a:t>
+            </a:r>
+            <a:endParaRPr lang="en-US" sz="900" dirty="0"/>
+          </a:p>
+        </p:txBody>
+      </p:sp>
+      <p:sp>
+        <p:nvSpPr>
+          <p:cNvPr id="3" name="Text 1"/>
+          <p:cNvSpPr txBox="1"/>
+          <p:nvPr/>
+        </p:nvSpPr>
+        <p:spPr>
+          <a:xfrm>
+            <a:off x="7589520" y="256032"/>
+            <a:ext cx="1097280" cy="228600"/>
+          </a:xfrm>
+          <a:prstGeom prst="rect">
+            <a:avLst/>
+          </a:prstGeom>
+          <a:noFill/>
+          <a:ln/>
+        </p:spPr>
+        <p:txBody>
+          <a:bodyPr wrap="square" lIns="0" tIns="0" rIns="0" bIns="0" rtlCol="0" anchor="ctr"/>
+          <a:lstStyle/>
+          <a:p>
+            <a:pPr algn="r" indent="0" marL="0">
+              <a:buNone/>
+            </a:pPr>
+            <a:r>
+              <a:rPr lang="en-US" sz="900" dirty="0">
+                <a:solidFill>
+                  <a:srgbClr val="6F8083"/>
+                </a:solidFill>
+                <a:latin typeface="Consolas" pitchFamily="34" charset="0"/>
+                <a:ea typeface="Consolas" pitchFamily="34" charset="-122"/>
+                <a:cs typeface="Consolas" pitchFamily="34" charset="-120"/>
+              </a:rPr>
+              <a:t>13 / 13</a:t>
             </a:r>
             <a:endParaRPr lang="en-US" sz="900" dirty="0"/>
           </a:p>
@@ -5704,7 +6809,7 @@
                 <a:ea typeface="Microsoft JhengHei" pitchFamily="34" charset="-122"/>
                 <a:cs typeface="Microsoft JhengHei" pitchFamily="34" charset="-120"/>
               </a:rPr>
-              <a:t>AI 平台目前最先導入哪一條產品線？客服、憑證辨識，還是內部開發工具？</a:t>
+              <a:t>這個職位面對客戶的比例大概多少？主要是導入、需求訪談，還是技術支援？</a:t>
             </a:r>
             <a:endParaRPr lang="en-US" sz="1050" dirty="0"/>
           </a:p>
@@ -5807,7 +6912,7 @@
                 <a:ea typeface="Microsoft JhengHei" pitchFamily="34" charset="-122"/>
                 <a:cs typeface="Microsoft JhengHei" pitchFamily="34" charset="-120"/>
               </a:rPr>
-              <a:t>RAG 的知識來源主要是法規公告、操作手冊，還是客服紀錄？更新頻率大概多高？</a:t>
+              <a:t>AI 平台目前最先導入哪一條產品線？客服、憑證辨識，還是內部開發工具？</a:t>
             </a:r>
             <a:endParaRPr lang="en-US" sz="1050" dirty="0"/>
           </a:p>
@@ -5910,7 +7015,7 @@
                 <a:ea typeface="Microsoft JhengHei" pitchFamily="34" charset="-122"/>
                 <a:cs typeface="Microsoft JhengHei" pitchFamily="34" charset="-120"/>
               </a:rPr>
-              <a:t>模型選擇雲端 API 或地端部署時，對統編、交易金額這類資料怎麼取捨？</a:t>
+              <a:t>RAG 的知識來源主要是法規公告、操作手冊，還是客服紀錄？更新頻率大概多高？</a:t>
             </a:r>
             <a:endParaRPr lang="en-US" sz="1050" dirty="0"/>
           </a:p>
@@ -6013,7 +7118,7 @@
                 <a:ea typeface="Microsoft JhengHei" pitchFamily="34" charset="-122"/>
                 <a:cs typeface="Microsoft JhengHei" pitchFamily="34" charset="-120"/>
               </a:rPr>
-              <a:t>團隊目前怎麼評估 LLM 輸出品質？有固定的測試集嗎？</a:t>
+              <a:t>模型選擇雲端 API 或地端部署時，對統編、交易金額這類資料怎麼取捨？</a:t>
             </a:r>
             <a:endParaRPr lang="en-US" sz="1050" dirty="0"/>
           </a:p>
@@ -6343,7 +7448,7 @@
                 <a:ea typeface="Consolas" pitchFamily="34" charset="-122"/>
                 <a:cs typeface="Consolas" pitchFamily="34" charset="-120"/>
               </a:rPr>
-              <a:t>02 / 12</a:t>
+              <a:t>02 / 13</a:t>
             </a:r>
             <a:endParaRPr lang="en-US" sz="900" dirty="0"/>
           </a:p>
@@ -7651,7 +8756,7 @@
                 <a:ea typeface="Consolas" pitchFamily="34" charset="-122"/>
                 <a:cs typeface="Consolas" pitchFamily="34" charset="-120"/>
               </a:rPr>
-              <a:t>03 / 12</a:t>
+              <a:t>03 / 13</a:t>
             </a:r>
             <a:endParaRPr lang="en-US" sz="900" dirty="0"/>
           </a:p>
@@ -10097,7 +11202,7 @@
                 <a:ea typeface="Consolas" pitchFamily="34" charset="-122"/>
                 <a:cs typeface="Consolas" pitchFamily="34" charset="-120"/>
               </a:rPr>
-              <a:t>04 / 12</a:t>
+              <a:t>04 / 13</a:t>
             </a:r>
             <a:endParaRPr lang="en-US" sz="900" dirty="0"/>
           </a:p>
@@ -11713,7 +12818,7 @@
                 <a:ea typeface="Consolas" pitchFamily="34" charset="-122"/>
                 <a:cs typeface="Consolas" pitchFamily="34" charset="-120"/>
               </a:rPr>
-              <a:t>05 / 12</a:t>
+              <a:t>05 / 13</a:t>
             </a:r>
             <a:endParaRPr lang="en-US" sz="900" dirty="0"/>
           </a:p>
@@ -12586,7 +13691,7 @@
                 <a:ea typeface="Consolas" pitchFamily="34" charset="-122"/>
                 <a:cs typeface="Consolas" pitchFamily="34" charset="-120"/>
               </a:rPr>
-              <a:t>06 / 12</a:t>
+              <a:t>06 / 13</a:t>
             </a:r>
             <a:endParaRPr lang="en-US" sz="900" dirty="0"/>
           </a:p>
@@ -13698,7 +14803,7 @@
                 <a:ea typeface="Consolas" pitchFamily="34" charset="-122"/>
                 <a:cs typeface="Consolas" pitchFamily="34" charset="-120"/>
               </a:rPr>
-              <a:t>07 / 12</a:t>
+              <a:t>07 / 13</a:t>
             </a:r>
             <a:endParaRPr lang="en-US" sz="900" dirty="0"/>
           </a:p>
@@ -14694,7 +15799,7 @@
                 <a:ea typeface="Consolas" pitchFamily="34" charset="-122"/>
                 <a:cs typeface="Consolas" pitchFamily="34" charset="-120"/>
               </a:rPr>
-              <a:t>08 / 12</a:t>
+              <a:t>08 / 13</a:t>
             </a:r>
             <a:endParaRPr lang="en-US" sz="900" dirty="0"/>
           </a:p>
@@ -15855,7 +16960,7 @@
                 <a:ea typeface="Consolas" pitchFamily="34" charset="-122"/>
                 <a:cs typeface="Consolas" pitchFamily="34" charset="-120"/>
               </a:rPr>
-              <a:t>09 / 12</a:t>
+              <a:t>09 / 13</a:t>
             </a:r>
             <a:endParaRPr lang="en-US" sz="900" dirty="0"/>
           </a:p>

--- a/邱冠文_關網AI應用工程師_面試簡報.pptx
+++ b/邱冠文_關網AI應用工程師_面試簡報.pptx
@@ -1130,7 +1130,7 @@
           <a:p>
             <a:r>
               <a:rPr lang="en-US" dirty="0"/>
-              <a:t>這是跟這個職缺最相關的專案。使用者輸入 IP 或網域後，第一輪讓模型自己決定要查哪幾個情資來源，四個工具都包在同一套快取邏輯裡；第二輪用 tool_choice 強制模型呼叫 submit_report，保證輸出一定是可以解析的 JSON。每一步決策都記錄在 MongoDB，高風險目標寫入黑名單，並開放查詢端點。整個服務用 Docker 部署在 Render。</a:t>
+              <a:t>這個專案我用 AI 協作開發：專案地圖與架構規劃是 AI 協助產生的，我負責依規劃實作、串接與部署。使用者輸入 IP 或網域後，第一輪讓模型自己決定要查哪幾個情資來源，四個工具都包在同一套快取邏輯裡；第二輪用 tool_choice 強制模型呼叫 submit_report，保證輸出一定是可以解析的 JSON。每一步決策都記錄在 MongoDB，高風險目標寫入黑名單，並開放查詢端點。整個服務用 Docker 部署在 Render。</a:t>
             </a:r>
             <a:endParaRPr lang="en-US" dirty="0"/>
           </a:p>
@@ -1218,7 +1218,7 @@
           <a:p>
             <a:r>
               <a:rPr lang="en-US" dirty="0"/>
-              <a:t>面試官如果問我為什麼這樣設計，這四點是我的理由。第一，結構化輸出：prompt 叫模型輸出 JSON 不可靠，改成強制呼叫工具就穩定了。第二，外部 API 有速率限制，所以做了共用的快取裝飾器。第三，Agent 的每一步都要能回溯。第四，AI 只負責判斷，不直接執行封鎖。另外我直接呼叫 Anthropic SDK、沒有用 LangChain，是為了讓每一步決策都透明；我也理解框架在流程變複雜時的價值，這部分正在補。</a:t>
+              <a:t>這四個設計是規劃時就定下的，我在實作過程中去理解每一個的理由。第一，只靠 prompt 要求 JSON 不穩定，所以強制呼叫提交報告的工具。第二，外部 API 有速率限制，所以用共用的快取裝飾器。第三，每一步決策都記錄下來，才能回溯。第四，AI 只負責判斷、不直接封鎖。如果被問「這是你設計的嗎」，就誠實說是 AI 協助規劃、我負責實作並理解理由。</a:t>
             </a:r>
             <a:endParaRPr lang="en-US" dirty="0"/>
           </a:p>
@@ -1394,7 +1394,7 @@
           <a:p>
             <a:r>
               <a:rPr lang="en-US" dirty="0"/>
-              <a:t>第二個專案是搶票系統。我負責全部後端，FastAPI 加 Redis。最有價值的經驗是：壓測時發現一個只有多程序併發才會出現的 race condition，我走完發現、找根因、修補、迴歸驗證整個流程，最後確認零超賣。（這裡請用你自己的話補上實際的根因與修法細節，面試官很可能追問。）電子發票系統同樣是高併發、不能出錯的場景，這種除錯流程可以直接帶過來。另外也整合了 Google Authenticator 的 TOTP 雙重驗證。</a:t>
+              <a:t>這是最能代表我自己能力的專案，主結構是我做的。開發中我發現兩個問題：第一，資料庫沒有用連線池，FastAPI 的非同步在這裡被卡住，人一多請求就排隊；第二，鎖票時我呼叫了 Redis 的 SET NX，卻沒有檢查回傳值，沒搶到鎖的請求也繼續往下走，人一多就開始互搶。我改用連線池，並依鎖定結果判斷，拿到鎖才繼續。壓測腳本是請 AI 寫的，用來驗證修正後零超賣。學到的是：非同步整條路徑不能有卡住的地方；呼叫了鎖不等於有鎖。（請用你記得的真實現象補充怎麼發現的。）</a:t>
             </a:r>
             <a:endParaRPr lang="en-US" dirty="0"/>
           </a:p>
@@ -11280,7 +11280,7 @@
                 <a:ea typeface="Microsoft JhengHei" pitchFamily="34" charset="-122"/>
                 <a:cs typeface="Microsoft JhengHei" pitchFamily="34" charset="-120"/>
               </a:rPr>
-              <a:t>使用者輸入 IP 或網域，Agent 自主選擇要查哪些情資來源，交叉比對後產出結構化風險報告。</a:t>
+              <a:t>AI 協作開發：架構規劃由 AI 協助產生，我負責實作、串接四個情資來源與部署。</a:t>
             </a:r>
             <a:endParaRPr lang="en-US" sz="1150" dirty="0"/>
           </a:p>
@@ -12857,7 +12857,7 @@
                 <a:ea typeface="Microsoft JhengHei" pitchFamily="34" charset="-122"/>
                 <a:cs typeface="Microsoft JhengHei" pitchFamily="34" charset="-120"/>
               </a:rPr>
-              <a:t>四個設計決策，以及背後的理由</a:t>
+              <a:t>這個架構的四個關鍵設計，以及理由</a:t>
             </a:r>
             <a:endParaRPr lang="en-US" sz="2600" dirty="0"/>
           </a:p>
@@ -15190,7 +15190,7 @@
                 <a:ea typeface="Microsoft JhengHei" pitchFamily="34" charset="-122"/>
                 <a:cs typeface="Microsoft JhengHei" pitchFamily="34" charset="-120"/>
               </a:rPr>
-              <a:t>我負責全部後端架構（2 人 GitHub 協作，比賽作品暨畢業專題）</a:t>
+              <a:t>主結構與後端是我做的；以下兩個併發問題是我自己發現並修正的</a:t>
             </a:r>
             <a:endParaRPr lang="en-US" sz="1100" dirty="0"/>
           </a:p>
@@ -15277,7 +15277,7 @@
                 <a:ea typeface="Microsoft JhengHei" pitchFamily="34" charset="-122"/>
                 <a:cs typeface="Microsoft JhengHei" pitchFamily="34" charset="-120"/>
               </a:rPr>
-              <a:t>壓測</a:t>
+              <a:t>問題一</a:t>
             </a:r>
             <a:endParaRPr lang="en-US" sz="1250" dirty="0"/>
           </a:p>
@@ -15316,7 +15316,7 @@
                 <a:ea typeface="Microsoft JhengHei" pitchFamily="34" charset="-122"/>
                 <a:cs typeface="Microsoft JhengHei" pitchFamily="34" charset="-120"/>
               </a:rPr>
-              <a:t>自寫壓力測試腳本，模擬 10～600 人同時搶票</a:t>
+              <a:t>資料庫沒有使用連線池，跟 FastAPI 的非同步互相衝突，人多就卡住</a:t>
             </a:r>
             <a:endParaRPr lang="en-US" sz="1100" dirty="0"/>
           </a:p>
@@ -15380,7 +15380,7 @@
                 <a:ea typeface="Microsoft JhengHei" pitchFamily="34" charset="-122"/>
                 <a:cs typeface="Microsoft JhengHei" pitchFamily="34" charset="-120"/>
               </a:rPr>
-              <a:t>發現</a:t>
+              <a:t>問題二</a:t>
             </a:r>
             <a:endParaRPr lang="en-US" sz="1250" dirty="0"/>
           </a:p>
@@ -15419,7 +15419,7 @@
                 <a:ea typeface="Microsoft JhengHei" pitchFamily="34" charset="-122"/>
                 <a:cs typeface="Microsoft JhengHei" pitchFamily="34" charset="-120"/>
               </a:rPr>
-              <a:t>一個只在多程序併發下才出現的 race condition，單程序測試抓不到</a:t>
+              <a:t>鎖票時沒檢查 SET NX 是否成功，沒搶到鎖的請求也往下走，人一多就互搶</a:t>
             </a:r>
             <a:endParaRPr lang="en-US" sz="1100" dirty="0"/>
           </a:p>
@@ -15483,7 +15483,7 @@
                 <a:ea typeface="Microsoft JhengHei" pitchFamily="34" charset="-122"/>
                 <a:cs typeface="Microsoft JhengHei" pitchFamily="34" charset="-120"/>
               </a:rPr>
-              <a:t>修補</a:t>
+              <a:t>修正</a:t>
             </a:r>
             <a:endParaRPr lang="en-US" sz="1250" dirty="0"/>
           </a:p>
@@ -15522,7 +15522,7 @@
                 <a:ea typeface="Microsoft JhengHei" pitchFamily="34" charset="-122"/>
                 <a:cs typeface="Microsoft JhengHei" pitchFamily="34" charset="-120"/>
               </a:rPr>
-              <a:t>完成根因分析並修補；座位衝突由 Redis SET NX 分散式鎖控管</a:t>
+              <a:t>改用連線池；依鎖定結果判斷，拿到鎖才進入驗證與確認</a:t>
             </a:r>
             <a:endParaRPr lang="en-US" sz="1100" dirty="0"/>
           </a:p>
@@ -15625,7 +15625,7 @@
                 <a:ea typeface="Microsoft JhengHei" pitchFamily="34" charset="-122"/>
                 <a:cs typeface="Microsoft JhengHei" pitchFamily="34" charset="-120"/>
               </a:rPr>
-              <a:t>迴歸壓測，確認票券零超賣</a:t>
+              <a:t>以 AI 撰寫的壓測腳本模擬 10～600 人同時搶票，確認零超賣</a:t>
             </a:r>
             <a:endParaRPr lang="en-US" sz="1100" dirty="0"/>
           </a:p>
